--- a/slides_work/01_Course.pptx
+++ b/slides_work/01_Course.pptx
@@ -5731,6 +5731,14 @@
 <file path=ppt/slides/slide1.xml><?xml version="1.0" encoding="utf-8"?>
 <p:sld xmlns:a="http://schemas.openxmlformats.org/drawingml/2006/main" xmlns:p="http://schemas.openxmlformats.org/presentationml/2006/main" xmlns:r="http://schemas.openxmlformats.org/officeDocument/2006/relationships">
   <p:cSld>
+    <p:bg>
+      <p:bgPr>
+        <a:solidFill>
+          <a:srgbClr val="FFFFFF"/>
+        </a:solidFill>
+        <a:effectLst/>
+      </p:bgPr>
+    </p:bg>
     <p:spTree>
       <p:nvGrpSpPr>
         <p:cNvPr id="1" name=""/>
@@ -5754,6 +5762,12 @@
           <a:lstStyle/>
           <a:p>
             <a:r>
+              <a:rPr sz="3200" b="1">
+                <a:solidFill>
+                  <a:srgbClr val="152334"/>
+                </a:solidFill>
+                <a:latin typeface="Arial"/>
+              </a:rPr>
               <a:t>Building Embedded Linux on the RPi4</a:t>
             </a:r>
           </a:p>
@@ -5775,22 +5789,46 @@
           <a:lstStyle/>
           <a:p>
             <a:r>
+              <a:rPr sz="1400">
+                <a:solidFill>
+                  <a:srgbClr val="152334"/>
+                </a:solidFill>
+                <a:latin typeface="Arial"/>
+              </a:rPr>
               <a:t>Instructor: [Your Name]</a:t>
             </a:r>
           </a:p>
           <a:p>
             <a:r>
+              <a:rPr sz="1400">
+                <a:solidFill>
+                  <a:srgbClr val="152334"/>
+                </a:solidFill>
+                <a:latin typeface="Arial"/>
+              </a:rPr>
               <a:t>UCSC Extension — Professional Program</a:t>
             </a:r>
           </a:p>
           <a:p>
             <a:r>
+              <a:rPr sz="1400">
+                <a:solidFill>
+                  <a:srgbClr val="152334"/>
+                </a:solidFill>
+                <a:latin typeface="Arial"/>
+              </a:rPr>
               <a:t>Summer/Fall 2026</a:t>
             </a:r>
           </a:p>
           <a:p/>
           <a:p>
             <a:r>
+              <a:rPr sz="1400">
+                <a:solidFill>
+                  <a:srgbClr val="152334"/>
+                </a:solidFill>
+                <a:latin typeface="Arial"/>
+              </a:rPr>
               <a:t>A hands-on journey from blank SD card to booting Linux on real hardware.</a:t>
             </a:r>
           </a:p>
@@ -5807,6 +5845,14 @@
 <file path=ppt/slides/slide10.xml><?xml version="1.0" encoding="utf-8"?>
 <p:sld xmlns:a="http://schemas.openxmlformats.org/drawingml/2006/main" xmlns:p="http://schemas.openxmlformats.org/presentationml/2006/main" xmlns:r="http://schemas.openxmlformats.org/officeDocument/2006/relationships">
   <p:cSld>
+    <p:bg>
+      <p:bgPr>
+        <a:solidFill>
+          <a:srgbClr val="F6F8FB"/>
+        </a:solidFill>
+        <a:effectLst/>
+      </p:bgPr>
+    </p:bg>
     <p:spTree>
       <p:nvGrpSpPr>
         <p:cNvPr id="1" name=""/>
@@ -5816,6 +5862,92 @@
       <p:grpSpPr/>
       <p:sp>
         <p:nvSpPr>
+          <p:cNvPr id="5" name="Rectangle 4"/>
+          <p:cNvSpPr/>
+          <p:nvPr/>
+        </p:nvSpPr>
+        <p:spPr>
+          <a:xfrm>
+            <a:off x="0" y="6756400"/>
+            <a:ext cx="9144000" cy="101600"/>
+          </a:xfrm>
+          <a:prstGeom prst="rect">
+            <a:avLst/>
+          </a:prstGeom>
+          <a:solidFill>
+            <a:srgbClr val="E8E8E8"/>
+          </a:solidFill>
+          <a:ln>
+            <a:noFill/>
+          </a:ln>
+        </p:spPr>
+        <p:style>
+          <a:lnRef idx="1">
+            <a:schemeClr val="accent1"/>
+          </a:lnRef>
+          <a:fillRef idx="3">
+            <a:schemeClr val="accent1"/>
+          </a:fillRef>
+          <a:effectRef idx="2">
+            <a:schemeClr val="accent1"/>
+          </a:effectRef>
+          <a:fontRef idx="minor">
+            <a:schemeClr val="lt1"/>
+          </a:fontRef>
+        </p:style>
+        <p:txBody>
+          <a:bodyPr rtlCol="0" anchor="ctr"/>
+          <a:lstStyle/>
+          <a:p>
+            <a:pPr algn="ctr"/>
+          </a:p>
+        </p:txBody>
+      </p:sp>
+      <p:sp>
+        <p:nvSpPr>
+          <p:cNvPr id="4" name="Rectangle 3"/>
+          <p:cNvSpPr/>
+          <p:nvPr/>
+        </p:nvSpPr>
+        <p:spPr>
+          <a:xfrm>
+            <a:off x="0" y="0"/>
+            <a:ext cx="9144000" cy="152400"/>
+          </a:xfrm>
+          <a:prstGeom prst="rect">
+            <a:avLst/>
+          </a:prstGeom>
+          <a:solidFill>
+            <a:srgbClr val="E6862E"/>
+          </a:solidFill>
+          <a:ln>
+            <a:noFill/>
+          </a:ln>
+        </p:spPr>
+        <p:style>
+          <a:lnRef idx="1">
+            <a:schemeClr val="accent1"/>
+          </a:lnRef>
+          <a:fillRef idx="3">
+            <a:schemeClr val="accent1"/>
+          </a:fillRef>
+          <a:effectRef idx="2">
+            <a:schemeClr val="accent1"/>
+          </a:effectRef>
+          <a:fontRef idx="minor">
+            <a:schemeClr val="lt1"/>
+          </a:fontRef>
+        </p:style>
+        <p:txBody>
+          <a:bodyPr rtlCol="0" anchor="ctr"/>
+          <a:lstStyle/>
+          <a:p>
+            <a:pPr algn="ctr"/>
+          </a:p>
+        </p:txBody>
+      </p:sp>
+      <p:sp>
+        <p:nvSpPr>
           <p:cNvPr id="2" name="Title 1"/>
           <p:cNvSpPr>
             <a:spLocks noGrp="1"/>
@@ -5830,6 +5962,12 @@
           <a:lstStyle/>
           <a:p>
             <a:r>
+              <a:rPr sz="3200" b="1">
+                <a:solidFill>
+                  <a:srgbClr val="152334"/>
+                </a:solidFill>
+                <a:latin typeface="Arial"/>
+              </a:rPr>
               <a:t>Cross-Development</a:t>
             </a:r>
           </a:p>
@@ -5851,70 +5989,148 @@
           <a:lstStyle/>
           <a:p>
             <a:r>
+              <a:rPr sz="1400">
+                <a:solidFill>
+                  <a:srgbClr val="152334"/>
+                </a:solidFill>
+                <a:latin typeface="Arial"/>
+              </a:rPr>
               <a:t>Build on x86 → Run on ARM</a:t>
             </a:r>
           </a:p>
           <a:p/>
           <a:p>
             <a:r>
+              <a:rPr sz="1400">
+                <a:solidFill>
+                  <a:srgbClr val="152334"/>
+                </a:solidFill>
+                <a:latin typeface="Arial"/>
+              </a:rPr>
               <a:t>Host (your workstation):</a:t>
             </a:r>
           </a:p>
           <a:p>
             <a:r>
+              <a:rPr sz="1400">
+                <a:solidFill>
+                  <a:srgbClr val="152334"/>
+                </a:solidFill>
+                <a:latin typeface="Arial"/>
+              </a:rPr>
               <a:t>  • x86_64, powerful, runs IDE and compiler</a:t>
             </a:r>
           </a:p>
           <a:p>
             <a:r>
+              <a:rPr sz="1400">
+                <a:solidFill>
+                  <a:srgbClr val="152334"/>
+                </a:solidFill>
+                <a:latin typeface="Arial"/>
+              </a:rPr>
               <a:t>  • Produces ARM64 binaries via cross-compiler</a:t>
             </a:r>
           </a:p>
           <a:p/>
           <a:p>
             <a:r>
+              <a:rPr sz="1400">
+                <a:solidFill>
+                  <a:srgbClr val="152334"/>
+                </a:solidFill>
+                <a:latin typeface="Arial"/>
+              </a:rPr>
               <a:t>Target (RPi4):</a:t>
             </a:r>
           </a:p>
           <a:p>
             <a:r>
+              <a:rPr sz="1400">
+                <a:solidFill>
+                  <a:srgbClr val="152334"/>
+                </a:solidFill>
+                <a:latin typeface="Arial"/>
+              </a:rPr>
               <a:t>  • aarch64 (ARMv8-A), limited resources</a:t>
             </a:r>
           </a:p>
           <a:p>
             <a:r>
+              <a:rPr sz="1400">
+                <a:solidFill>
+                  <a:srgbClr val="152334"/>
+                </a:solidFill>
+                <a:latin typeface="Arial"/>
+              </a:rPr>
               <a:t>  • Runs the compiled binaries</a:t>
             </a:r>
           </a:p>
           <a:p/>
           <a:p>
             <a:r>
+              <a:rPr sz="1400">
+                <a:solidFill>
+                  <a:srgbClr val="152334"/>
+                </a:solidFill>
+                <a:latin typeface="Arial"/>
+              </a:rPr>
               <a:t>The cross-compiler:</a:t>
             </a:r>
           </a:p>
           <a:p>
             <a:r>
+              <a:rPr sz="1400">
+                <a:solidFill>
+                  <a:srgbClr val="152334"/>
+                </a:solidFill>
+                <a:latin typeface="Arial"/>
+              </a:rPr>
               <a:t>  • aarch64-none-linux-gnu-gcc</a:t>
             </a:r>
           </a:p>
           <a:p>
             <a:r>
+              <a:rPr sz="1400">
+                <a:solidFill>
+                  <a:srgbClr val="152334"/>
+                </a:solidFill>
+                <a:latin typeface="Arial"/>
+              </a:rPr>
               <a:t>  • Runs on x86, produces ARM64 code</a:t>
             </a:r>
           </a:p>
           <a:p>
             <a:r>
+              <a:rPr sz="1400">
+                <a:solidFill>
+                  <a:srgbClr val="152334"/>
+                </a:solidFill>
+                <a:latin typeface="Arial"/>
+              </a:rPr>
               <a:t>  • Part of the Arm GNU Toolchain</a:t>
             </a:r>
           </a:p>
           <a:p/>
           <a:p>
             <a:r>
+              <a:rPr sz="1400">
+                <a:solidFill>
+                  <a:srgbClr val="152334"/>
+                </a:solidFill>
+                <a:latin typeface="Arial"/>
+              </a:rPr>
               <a:t>Reference: Bootlin embedded Linux training materials</a:t>
             </a:r>
           </a:p>
           <a:p>
             <a:r>
+              <a:rPr sz="1400">
+                <a:solidFill>
+                  <a:srgbClr val="152334"/>
+                </a:solidFill>
+                <a:latin typeface="Arial"/>
+              </a:rPr>
               <a:t>  bootlin.com/doc/training/embedded-linux</a:t>
             </a:r>
           </a:p>
@@ -5931,6 +6147,14 @@
 <file path=ppt/slides/slide11.xml><?xml version="1.0" encoding="utf-8"?>
 <p:sld xmlns:a="http://schemas.openxmlformats.org/drawingml/2006/main" xmlns:p="http://schemas.openxmlformats.org/presentationml/2006/main" xmlns:r="http://schemas.openxmlformats.org/officeDocument/2006/relationships">
   <p:cSld>
+    <p:bg>
+      <p:bgPr>
+        <a:solidFill>
+          <a:srgbClr val="F6F8FB"/>
+        </a:solidFill>
+        <a:effectLst/>
+      </p:bgPr>
+    </p:bg>
     <p:spTree>
       <p:nvGrpSpPr>
         <p:cNvPr id="1" name=""/>
@@ -5940,6 +6164,92 @@
       <p:grpSpPr/>
       <p:sp>
         <p:nvSpPr>
+          <p:cNvPr id="5" name="Rectangle 4"/>
+          <p:cNvSpPr/>
+          <p:nvPr/>
+        </p:nvSpPr>
+        <p:spPr>
+          <a:xfrm>
+            <a:off x="0" y="6756400"/>
+            <a:ext cx="9144000" cy="101600"/>
+          </a:xfrm>
+          <a:prstGeom prst="rect">
+            <a:avLst/>
+          </a:prstGeom>
+          <a:solidFill>
+            <a:srgbClr val="E8E8E8"/>
+          </a:solidFill>
+          <a:ln>
+            <a:noFill/>
+          </a:ln>
+        </p:spPr>
+        <p:style>
+          <a:lnRef idx="1">
+            <a:schemeClr val="accent1"/>
+          </a:lnRef>
+          <a:fillRef idx="3">
+            <a:schemeClr val="accent1"/>
+          </a:fillRef>
+          <a:effectRef idx="2">
+            <a:schemeClr val="accent1"/>
+          </a:effectRef>
+          <a:fontRef idx="minor">
+            <a:schemeClr val="lt1"/>
+          </a:fontRef>
+        </p:style>
+        <p:txBody>
+          <a:bodyPr rtlCol="0" anchor="ctr"/>
+          <a:lstStyle/>
+          <a:p>
+            <a:pPr algn="ctr"/>
+          </a:p>
+        </p:txBody>
+      </p:sp>
+      <p:sp>
+        <p:nvSpPr>
+          <p:cNvPr id="4" name="Rectangle 3"/>
+          <p:cNvSpPr/>
+          <p:nvPr/>
+        </p:nvSpPr>
+        <p:spPr>
+          <a:xfrm>
+            <a:off x="0" y="0"/>
+            <a:ext cx="9144000" cy="152400"/>
+          </a:xfrm>
+          <a:prstGeom prst="rect">
+            <a:avLst/>
+          </a:prstGeom>
+          <a:solidFill>
+            <a:srgbClr val="197A8C"/>
+          </a:solidFill>
+          <a:ln>
+            <a:noFill/>
+          </a:ln>
+        </p:spPr>
+        <p:style>
+          <a:lnRef idx="1">
+            <a:schemeClr val="accent1"/>
+          </a:lnRef>
+          <a:fillRef idx="3">
+            <a:schemeClr val="accent1"/>
+          </a:fillRef>
+          <a:effectRef idx="2">
+            <a:schemeClr val="accent1"/>
+          </a:effectRef>
+          <a:fontRef idx="minor">
+            <a:schemeClr val="lt1"/>
+          </a:fontRef>
+        </p:style>
+        <p:txBody>
+          <a:bodyPr rtlCol="0" anchor="ctr"/>
+          <a:lstStyle/>
+          <a:p>
+            <a:pPr algn="ctr"/>
+          </a:p>
+        </p:txBody>
+      </p:sp>
+      <p:sp>
+        <p:nvSpPr>
           <p:cNvPr id="2" name="Title 1"/>
           <p:cNvSpPr>
             <a:spLocks noGrp="1"/>
@@ -5954,6 +6264,12 @@
           <a:lstStyle/>
           <a:p>
             <a:r>
+              <a:rPr sz="3200" b="1">
+                <a:solidFill>
+                  <a:srgbClr val="152334"/>
+                </a:solidFill>
+                <a:latin typeface="Arial"/>
+              </a:rPr>
               <a:t>The Development Workflow</a:t>
             </a:r>
           </a:p>
@@ -5975,59 +6291,125 @@
           <a:lstStyle/>
           <a:p>
             <a:r>
+              <a:rPr sz="1400">
+                <a:solidFill>
+                  <a:srgbClr val="152334"/>
+                </a:solidFill>
+                <a:latin typeface="Arial"/>
+              </a:rPr>
               <a:t>Edit → Cross-compile → Transfer → Test → Debug</a:t>
             </a:r>
           </a:p>
           <a:p/>
           <a:p>
             <a:r>
+              <a:rPr sz="1400">
+                <a:solidFill>
+                  <a:srgbClr val="152334"/>
+                </a:solidFill>
+                <a:latin typeface="Arial"/>
+              </a:rPr>
               <a:t>Edit:     Source code on host (your IDE/editor)</a:t>
             </a:r>
           </a:p>
           <a:p>
             <a:r>
+              <a:rPr sz="1400">
+                <a:solidFill>
+                  <a:srgbClr val="152334"/>
+                </a:solidFill>
+                <a:latin typeface="Arial"/>
+              </a:rPr>
               <a:t>Compile:  aarch64-none-linux-gnu-gcc -o app app.c</a:t>
             </a:r>
           </a:p>
           <a:p>
             <a:r>
+              <a:rPr sz="1400">
+                <a:solidFill>
+                  <a:srgbClr val="152334"/>
+                </a:solidFill>
+                <a:latin typeface="Arial"/>
+              </a:rPr>
               <a:t>Transfer: NFS rootfs, SCP, or SD card copy</a:t>
             </a:r>
           </a:p>
           <a:p>
             <a:r>
+              <a:rPr sz="1400">
+                <a:solidFill>
+                  <a:srgbClr val="152334"/>
+                </a:solidFill>
+                <a:latin typeface="Arial"/>
+              </a:rPr>
               <a:t>Test:     Run on target, observe output</a:t>
             </a:r>
           </a:p>
           <a:p>
             <a:r>
+              <a:rPr sz="1400">
+                <a:solidFill>
+                  <a:srgbClr val="152334"/>
+                </a:solidFill>
+                <a:latin typeface="Arial"/>
+              </a:rPr>
               <a:t>Debug:    GDB on host, gdbserver on target</a:t>
             </a:r>
           </a:p>
           <a:p/>
           <a:p>
             <a:r>
+              <a:rPr sz="1400">
+                <a:solidFill>
+                  <a:srgbClr val="152334"/>
+                </a:solidFill>
+                <a:latin typeface="Arial"/>
+              </a:rPr>
               <a:t>NFS root filesystem for rapid iteration:</a:t>
             </a:r>
           </a:p>
           <a:p>
             <a:r>
+              <a:rPr sz="1400">
+                <a:solidFill>
+                  <a:srgbClr val="152334"/>
+                </a:solidFill>
+                <a:latin typeface="Arial"/>
+              </a:rPr>
               <a:t>  • Target mounts rootfs over network</a:t>
             </a:r>
           </a:p>
           <a:p>
             <a:r>
+              <a:rPr sz="1400">
+                <a:solidFill>
+                  <a:srgbClr val="152334"/>
+                </a:solidFill>
+                <a:latin typeface="Arial"/>
+              </a:rPr>
               <a:t>  • Edit on host → instantly visible on target</a:t>
             </a:r>
           </a:p>
           <a:p>
             <a:r>
+              <a:rPr sz="1400">
+                <a:solidFill>
+                  <a:srgbClr val="152334"/>
+                </a:solidFill>
+                <a:latin typeface="Arial"/>
+              </a:rPr>
               <a:t>  • No SD card flashing cycle</a:t>
             </a:r>
           </a:p>
           <a:p/>
           <a:p>
             <a:r>
+              <a:rPr sz="1400">
+                <a:solidFill>
+                  <a:srgbClr val="152334"/>
+                </a:solidFill>
+                <a:latin typeface="Arial"/>
+              </a:rPr>
               <a:t>Serial console for output and U-Boot interaction</a:t>
             </a:r>
           </a:p>
@@ -6044,6 +6426,14 @@
 <file path=ppt/slides/slide12.xml><?xml version="1.0" encoding="utf-8"?>
 <p:sld xmlns:a="http://schemas.openxmlformats.org/drawingml/2006/main" xmlns:p="http://schemas.openxmlformats.org/presentationml/2006/main" xmlns:r="http://schemas.openxmlformats.org/officeDocument/2006/relationships">
   <p:cSld>
+    <p:bg>
+      <p:bgPr>
+        <a:solidFill>
+          <a:srgbClr val="F6F8FB"/>
+        </a:solidFill>
+        <a:effectLst/>
+      </p:bgPr>
+    </p:bg>
     <p:spTree>
       <p:nvGrpSpPr>
         <p:cNvPr id="1" name=""/>
@@ -6053,6 +6443,92 @@
       <p:grpSpPr/>
       <p:sp>
         <p:nvSpPr>
+          <p:cNvPr id="5" name="Rectangle 4"/>
+          <p:cNvSpPr/>
+          <p:nvPr/>
+        </p:nvSpPr>
+        <p:spPr>
+          <a:xfrm>
+            <a:off x="0" y="6756400"/>
+            <a:ext cx="9144000" cy="101600"/>
+          </a:xfrm>
+          <a:prstGeom prst="rect">
+            <a:avLst/>
+          </a:prstGeom>
+          <a:solidFill>
+            <a:srgbClr val="E8E8E8"/>
+          </a:solidFill>
+          <a:ln>
+            <a:noFill/>
+          </a:ln>
+        </p:spPr>
+        <p:style>
+          <a:lnRef idx="1">
+            <a:schemeClr val="accent1"/>
+          </a:lnRef>
+          <a:fillRef idx="3">
+            <a:schemeClr val="accent1"/>
+          </a:fillRef>
+          <a:effectRef idx="2">
+            <a:schemeClr val="accent1"/>
+          </a:effectRef>
+          <a:fontRef idx="minor">
+            <a:schemeClr val="lt1"/>
+          </a:fontRef>
+        </p:style>
+        <p:txBody>
+          <a:bodyPr rtlCol="0" anchor="ctr"/>
+          <a:lstStyle/>
+          <a:p>
+            <a:pPr algn="ctr"/>
+          </a:p>
+        </p:txBody>
+      </p:sp>
+      <p:sp>
+        <p:nvSpPr>
+          <p:cNvPr id="4" name="Rectangle 3"/>
+          <p:cNvSpPr/>
+          <p:nvPr/>
+        </p:nvSpPr>
+        <p:spPr>
+          <a:xfrm>
+            <a:off x="0" y="0"/>
+            <a:ext cx="9144000" cy="152400"/>
+          </a:xfrm>
+          <a:prstGeom prst="rect">
+            <a:avLst/>
+          </a:prstGeom>
+          <a:solidFill>
+            <a:srgbClr val="3D6FF6"/>
+          </a:solidFill>
+          <a:ln>
+            <a:noFill/>
+          </a:ln>
+        </p:spPr>
+        <p:style>
+          <a:lnRef idx="1">
+            <a:schemeClr val="accent1"/>
+          </a:lnRef>
+          <a:fillRef idx="3">
+            <a:schemeClr val="accent1"/>
+          </a:fillRef>
+          <a:effectRef idx="2">
+            <a:schemeClr val="accent1"/>
+          </a:effectRef>
+          <a:fontRef idx="minor">
+            <a:schemeClr val="lt1"/>
+          </a:fontRef>
+        </p:style>
+        <p:txBody>
+          <a:bodyPr rtlCol="0" anchor="ctr"/>
+          <a:lstStyle/>
+          <a:p>
+            <a:pPr algn="ctr"/>
+          </a:p>
+        </p:txBody>
+      </p:sp>
+      <p:sp>
+        <p:nvSpPr>
           <p:cNvPr id="2" name="Title 1"/>
           <p:cNvSpPr>
             <a:spLocks noGrp="1"/>
@@ -6067,6 +6543,12 @@
           <a:lstStyle/>
           <a:p>
             <a:r>
+              <a:rPr sz="3200" b="1">
+                <a:solidFill>
+                  <a:srgbClr val="152334"/>
+                </a:solidFill>
+                <a:latin typeface="Arial"/>
+              </a:rPr>
               <a:t>AI in This Course</a:t>
             </a:r>
           </a:p>
@@ -6088,75 +6570,159 @@
           <a:lstStyle/>
           <a:p>
             <a:r>
+              <a:rPr sz="1400">
+                <a:solidFill>
+                  <a:srgbClr val="152334"/>
+                </a:solidFill>
+                <a:latin typeface="Arial"/>
+              </a:rPr>
               <a:t>Three layers of AI integration:</a:t>
             </a:r>
           </a:p>
           <a:p/>
           <a:p>
             <a:r>
+              <a:rPr sz="1400">
+                <a:solidFill>
+                  <a:srgbClr val="152334"/>
+                </a:solidFill>
+                <a:latin typeface="Arial"/>
+              </a:rPr>
               <a:t>Layer 1 — AI as Build Assistant</a:t>
             </a:r>
           </a:p>
           <a:p>
             <a:r>
+              <a:rPr sz="1400">
+                <a:solidFill>
+                  <a:srgbClr val="152334"/>
+                </a:solidFill>
+                <a:latin typeface="Arial"/>
+              </a:rPr>
               <a:t>  • Explain error messages, suggest fixes</a:t>
             </a:r>
           </a:p>
           <a:p>
             <a:r>
+              <a:rPr sz="1400">
+                <a:solidFill>
+                  <a:srgbClr val="152334"/>
+                </a:solidFill>
+                <a:latin typeface="Arial"/>
+              </a:rPr>
               <a:t>  • Generate boilerplate code, Kconfig snippets</a:t>
             </a:r>
           </a:p>
           <a:p>
             <a:r>
+              <a:rPr sz="1400">
+                <a:solidFill>
+                  <a:srgbClr val="152334"/>
+                </a:solidFill>
+                <a:latin typeface="Arial"/>
+              </a:rPr>
               <a:t>  • Starting today, in every session</a:t>
             </a:r>
           </a:p>
           <a:p/>
           <a:p>
             <a:r>
+              <a:rPr sz="1400">
+                <a:solidFill>
+                  <a:srgbClr val="152334"/>
+                </a:solidFill>
+                <a:latin typeface="Arial"/>
+              </a:rPr>
               <a:t>Layer 2 — AI for Code Analysis</a:t>
             </a:r>
           </a:p>
           <a:p>
             <a:r>
+              <a:rPr sz="1400">
+                <a:solidFill>
+                  <a:srgbClr val="152334"/>
+                </a:solidFill>
+                <a:latin typeface="Arial"/>
+              </a:rPr>
               <a:t>  • Read and explain kernel config options</a:t>
             </a:r>
           </a:p>
           <a:p>
             <a:r>
+              <a:rPr sz="1400">
+                <a:solidFill>
+                  <a:srgbClr val="152334"/>
+                </a:solidFill>
+                <a:latin typeface="Arial"/>
+              </a:rPr>
               <a:t>  • Analyze cross-compilation output (readelf, objdump)</a:t>
             </a:r>
           </a:p>
           <a:p>
             <a:r>
+              <a:rPr sz="1400">
+                <a:solidFill>
+                  <a:srgbClr val="152334"/>
+                </a:solidFill>
+                <a:latin typeface="Arial"/>
+              </a:rPr>
               <a:t>  • Lab exercise in Session 2</a:t>
             </a:r>
           </a:p>
           <a:p/>
           <a:p>
             <a:r>
+              <a:rPr sz="1400">
+                <a:solidFill>
+                  <a:srgbClr val="152334"/>
+                </a:solidFill>
+                <a:latin typeface="Arial"/>
+              </a:rPr>
               <a:t>Layer 3 — AI for System Design</a:t>
             </a:r>
           </a:p>
           <a:p>
             <a:r>
+              <a:rPr sz="1400">
+                <a:solidFill>
+                  <a:srgbClr val="152334"/>
+                </a:solidFill>
+                <a:latin typeface="Arial"/>
+              </a:rPr>
               <a:t>  • Evaluate design tradeoffs</a:t>
             </a:r>
           </a:p>
           <a:p>
             <a:r>
+              <a:rPr sz="1400">
+                <a:solidFill>
+                  <a:srgbClr val="152334"/>
+                </a:solidFill>
+                <a:latin typeface="Arial"/>
+              </a:rPr>
               <a:t>  • Suggest kernel configuration for requirements</a:t>
             </a:r>
           </a:p>
           <a:p>
             <a:r>
+              <a:rPr sz="1400">
+                <a:solidFill>
+                  <a:srgbClr val="152334"/>
+                </a:solidFill>
+                <a:latin typeface="Arial"/>
+              </a:rPr>
               <a:t>  • Capstone project support in Sessions 9-10</a:t>
             </a:r>
           </a:p>
           <a:p/>
           <a:p>
             <a:r>
+              <a:rPr sz="1400">
+                <a:solidFill>
+                  <a:srgbClr val="152334"/>
+                </a:solidFill>
+                <a:latin typeface="Arial"/>
+              </a:rPr>
               <a:t>You completed the AI for Programmers session — this is where we apply it.</a:t>
             </a:r>
           </a:p>
@@ -6173,6 +6739,14 @@
 <file path=ppt/slides/slide13.xml><?xml version="1.0" encoding="utf-8"?>
 <p:sld xmlns:a="http://schemas.openxmlformats.org/drawingml/2006/main" xmlns:p="http://schemas.openxmlformats.org/presentationml/2006/main" xmlns:r="http://schemas.openxmlformats.org/officeDocument/2006/relationships">
   <p:cSld>
+    <p:bg>
+      <p:bgPr>
+        <a:solidFill>
+          <a:srgbClr val="F6F8FB"/>
+        </a:solidFill>
+        <a:effectLst/>
+      </p:bgPr>
+    </p:bg>
     <p:spTree>
       <p:nvGrpSpPr>
         <p:cNvPr id="1" name=""/>
@@ -6182,6 +6756,92 @@
       <p:grpSpPr/>
       <p:sp>
         <p:nvSpPr>
+          <p:cNvPr id="5" name="Rectangle 4"/>
+          <p:cNvSpPr/>
+          <p:nvPr/>
+        </p:nvSpPr>
+        <p:spPr>
+          <a:xfrm>
+            <a:off x="0" y="6756400"/>
+            <a:ext cx="9144000" cy="101600"/>
+          </a:xfrm>
+          <a:prstGeom prst="rect">
+            <a:avLst/>
+          </a:prstGeom>
+          <a:solidFill>
+            <a:srgbClr val="E8E8E8"/>
+          </a:solidFill>
+          <a:ln>
+            <a:noFill/>
+          </a:ln>
+        </p:spPr>
+        <p:style>
+          <a:lnRef idx="1">
+            <a:schemeClr val="accent1"/>
+          </a:lnRef>
+          <a:fillRef idx="3">
+            <a:schemeClr val="accent1"/>
+          </a:fillRef>
+          <a:effectRef idx="2">
+            <a:schemeClr val="accent1"/>
+          </a:effectRef>
+          <a:fontRef idx="minor">
+            <a:schemeClr val="lt1"/>
+          </a:fontRef>
+        </p:style>
+        <p:txBody>
+          <a:bodyPr rtlCol="0" anchor="ctr"/>
+          <a:lstStyle/>
+          <a:p>
+            <a:pPr algn="ctr"/>
+          </a:p>
+        </p:txBody>
+      </p:sp>
+      <p:sp>
+        <p:nvSpPr>
+          <p:cNvPr id="4" name="Rectangle 3"/>
+          <p:cNvSpPr/>
+          <p:nvPr/>
+        </p:nvSpPr>
+        <p:spPr>
+          <a:xfrm>
+            <a:off x="0" y="0"/>
+            <a:ext cx="9144000" cy="152400"/>
+          </a:xfrm>
+          <a:prstGeom prst="rect">
+            <a:avLst/>
+          </a:prstGeom>
+          <a:solidFill>
+            <a:srgbClr val="F0B342"/>
+          </a:solidFill>
+          <a:ln>
+            <a:noFill/>
+          </a:ln>
+        </p:spPr>
+        <p:style>
+          <a:lnRef idx="1">
+            <a:schemeClr val="accent1"/>
+          </a:lnRef>
+          <a:fillRef idx="3">
+            <a:schemeClr val="accent1"/>
+          </a:fillRef>
+          <a:effectRef idx="2">
+            <a:schemeClr val="accent1"/>
+          </a:effectRef>
+          <a:fontRef idx="minor">
+            <a:schemeClr val="lt1"/>
+          </a:fontRef>
+        </p:style>
+        <p:txBody>
+          <a:bodyPr rtlCol="0" anchor="ctr"/>
+          <a:lstStyle/>
+          <a:p>
+            <a:pPr algn="ctr"/>
+          </a:p>
+        </p:txBody>
+      </p:sp>
+      <p:sp>
+        <p:nvSpPr>
           <p:cNvPr id="2" name="Title 1"/>
           <p:cNvSpPr>
             <a:spLocks noGrp="1"/>
@@ -6196,6 +6856,12 @@
           <a:lstStyle/>
           <a:p>
             <a:r>
+              <a:rPr sz="3200" b="1">
+                <a:solidFill>
+                  <a:srgbClr val="152334"/>
+                </a:solidFill>
+                <a:latin typeface="Arial"/>
+              </a:rPr>
               <a:t>Session-by-Session Build Pipeline</a:t>
             </a:r>
           </a:p>
@@ -6217,62 +6883,134 @@
           <a:lstStyle/>
           <a:p>
             <a:r>
+              <a:rPr sz="1400">
+                <a:solidFill>
+                  <a:srgbClr val="152334"/>
+                </a:solidFill>
+                <a:latin typeface="Arial"/>
+              </a:rPr>
               <a:t>Hardware ──→ Bootloader ──→ Kernel ──→ Rootfs ──→ App</a:t>
             </a:r>
           </a:p>
           <a:p>
             <a:r>
+              <a:rPr sz="1400">
+                <a:solidFill>
+                  <a:srgbClr val="152334"/>
+                </a:solidFill>
+                <a:latin typeface="Arial"/>
+              </a:rPr>
               <a:t>              Session 2    Session 3   Session 4   Session 7-8</a:t>
             </a:r>
           </a:p>
           <a:p/>
           <a:p>
             <a:r>
+              <a:rPr sz="1400">
+                <a:solidFill>
+                  <a:srgbClr val="152334"/>
+                </a:solidFill>
+                <a:latin typeface="Arial"/>
+              </a:rPr>
               <a:t>Sess 1: Overview &amp; First Boot [NOW]</a:t>
             </a:r>
           </a:p>
           <a:p>
             <a:r>
+              <a:rPr sz="1400">
+                <a:solidFill>
+                  <a:srgbClr val="152334"/>
+                </a:solidFill>
+                <a:latin typeface="Arial"/>
+              </a:rPr>
               <a:t>Sess 2: Toolchain + U-Boot</a:t>
             </a:r>
           </a:p>
           <a:p>
             <a:r>
+              <a:rPr sz="1400">
+                <a:solidFill>
+                  <a:srgbClr val="152334"/>
+                </a:solidFill>
+                <a:latin typeface="Arial"/>
+              </a:rPr>
               <a:t>Sess 3: Yocto/Buildroot (automated build)</a:t>
             </a:r>
           </a:p>
           <a:p>
             <a:r>
+              <a:rPr sz="1400">
+                <a:solidFill>
+                  <a:srgbClr val="152334"/>
+                </a:solidFill>
+                <a:latin typeface="Arial"/>
+              </a:rPr>
               <a:t>Sess 4: Storage, filesystems, OTA updates</a:t>
             </a:r>
           </a:p>
           <a:p>
             <a:r>
+              <a:rPr sz="1400">
+                <a:solidFill>
+                  <a:srgbClr val="152334"/>
+                </a:solidFill>
+                <a:latin typeface="Arial"/>
+              </a:rPr>
               <a:t>Sess 5: Kernel internals, modules, init</a:t>
             </a:r>
           </a:p>
           <a:p>
             <a:r>
+              <a:rPr sz="1400">
+                <a:solidFill>
+                  <a:srgbClr val="152334"/>
+                </a:solidFill>
+                <a:latin typeface="Arial"/>
+              </a:rPr>
               <a:t>Sess 6: Device trees, sysfs, interrupts</a:t>
             </a:r>
           </a:p>
           <a:p>
             <a:r>
+              <a:rPr sz="1400">
+                <a:solidFill>
+                  <a:srgbClr val="152334"/>
+                </a:solidFill>
+                <a:latin typeface="Arial"/>
+              </a:rPr>
               <a:t>Sess 7: Processes, threads, IPC</a:t>
             </a:r>
           </a:p>
           <a:p>
             <a:r>
+              <a:rPr sz="1400">
+                <a:solidFill>
+                  <a:srgbClr val="152334"/>
+                </a:solidFill>
+                <a:latin typeface="Arial"/>
+              </a:rPr>
               <a:t>Sess 8: Embedded applications, Python</a:t>
             </a:r>
           </a:p>
           <a:p>
             <a:r>
+              <a:rPr sz="1400">
+                <a:solidFill>
+                  <a:srgbClr val="152334"/>
+                </a:solidFill>
+                <a:latin typeface="Arial"/>
+              </a:rPr>
               <a:t>Sess 9: GDB, strace, perf, ftrace</a:t>
             </a:r>
           </a:p>
           <a:p>
             <a:r>
+              <a:rPr sz="1400">
+                <a:solidFill>
+                  <a:srgbClr val="152334"/>
+                </a:solidFill>
+                <a:latin typeface="Arial"/>
+              </a:rPr>
               <a:t>Sess 10: PREEMPT_RT, latency measurement</a:t>
             </a:r>
           </a:p>
@@ -6289,6 +7027,14 @@
 <file path=ppt/slides/slide14.xml><?xml version="1.0" encoding="utf-8"?>
 <p:sld xmlns:a="http://schemas.openxmlformats.org/drawingml/2006/main" xmlns:p="http://schemas.openxmlformats.org/presentationml/2006/main" xmlns:r="http://schemas.openxmlformats.org/officeDocument/2006/relationships">
   <p:cSld>
+    <p:bg>
+      <p:bgPr>
+        <a:solidFill>
+          <a:srgbClr val="F6F8FB"/>
+        </a:solidFill>
+        <a:effectLst/>
+      </p:bgPr>
+    </p:bg>
     <p:spTree>
       <p:nvGrpSpPr>
         <p:cNvPr id="1" name=""/>
@@ -6298,6 +7044,92 @@
       <p:grpSpPr/>
       <p:sp>
         <p:nvSpPr>
+          <p:cNvPr id="5" name="Rectangle 4"/>
+          <p:cNvSpPr/>
+          <p:nvPr/>
+        </p:nvSpPr>
+        <p:spPr>
+          <a:xfrm>
+            <a:off x="0" y="6756400"/>
+            <a:ext cx="9144000" cy="101600"/>
+          </a:xfrm>
+          <a:prstGeom prst="rect">
+            <a:avLst/>
+          </a:prstGeom>
+          <a:solidFill>
+            <a:srgbClr val="E8E8E8"/>
+          </a:solidFill>
+          <a:ln>
+            <a:noFill/>
+          </a:ln>
+        </p:spPr>
+        <p:style>
+          <a:lnRef idx="1">
+            <a:schemeClr val="accent1"/>
+          </a:lnRef>
+          <a:fillRef idx="3">
+            <a:schemeClr val="accent1"/>
+          </a:fillRef>
+          <a:effectRef idx="2">
+            <a:schemeClr val="accent1"/>
+          </a:effectRef>
+          <a:fontRef idx="minor">
+            <a:schemeClr val="lt1"/>
+          </a:fontRef>
+        </p:style>
+        <p:txBody>
+          <a:bodyPr rtlCol="0" anchor="ctr"/>
+          <a:lstStyle/>
+          <a:p>
+            <a:pPr algn="ctr"/>
+          </a:p>
+        </p:txBody>
+      </p:sp>
+      <p:sp>
+        <p:nvSpPr>
+          <p:cNvPr id="4" name="Rectangle 3"/>
+          <p:cNvSpPr/>
+          <p:nvPr/>
+        </p:nvSpPr>
+        <p:spPr>
+          <a:xfrm>
+            <a:off x="0" y="0"/>
+            <a:ext cx="9144000" cy="152400"/>
+          </a:xfrm>
+          <a:prstGeom prst="rect">
+            <a:avLst/>
+          </a:prstGeom>
+          <a:solidFill>
+            <a:srgbClr val="E6862E"/>
+          </a:solidFill>
+          <a:ln>
+            <a:noFill/>
+          </a:ln>
+        </p:spPr>
+        <p:style>
+          <a:lnRef idx="1">
+            <a:schemeClr val="accent1"/>
+          </a:lnRef>
+          <a:fillRef idx="3">
+            <a:schemeClr val="accent1"/>
+          </a:fillRef>
+          <a:effectRef idx="2">
+            <a:schemeClr val="accent1"/>
+          </a:effectRef>
+          <a:fontRef idx="minor">
+            <a:schemeClr val="lt1"/>
+          </a:fontRef>
+        </p:style>
+        <p:txBody>
+          <a:bodyPr rtlCol="0" anchor="ctr"/>
+          <a:lstStyle/>
+          <a:p>
+            <a:pPr algn="ctr"/>
+          </a:p>
+        </p:txBody>
+      </p:sp>
+      <p:sp>
+        <p:nvSpPr>
           <p:cNvPr id="2" name="Title 1"/>
           <p:cNvSpPr>
             <a:spLocks noGrp="1"/>
@@ -6312,6 +7144,12 @@
           <a:lstStyle/>
           <a:p>
             <a:r>
+              <a:rPr sz="3200" b="1">
+                <a:solidFill>
+                  <a:srgbClr val="152334"/>
+                </a:solidFill>
+                <a:latin typeface="Arial"/>
+              </a:rPr>
               <a:t>The Toolchain</a:t>
             </a:r>
           </a:p>
@@ -6333,69 +7171,147 @@
           <a:lstStyle/>
           <a:p>
             <a:r>
+              <a:rPr sz="1400">
+                <a:solidFill>
+                  <a:srgbClr val="152334"/>
+                </a:solidFill>
+                <a:latin typeface="Arial"/>
+              </a:rPr>
               <a:t>GCC Cross-Compiler</a:t>
             </a:r>
           </a:p>
           <a:p>
             <a:r>
+              <a:rPr sz="1400">
+                <a:solidFill>
+                  <a:srgbClr val="152334"/>
+                </a:solidFill>
+                <a:latin typeface="Arial"/>
+              </a:rPr>
               <a:t>  • Host: x86_64 Linux workstation</a:t>
             </a:r>
           </a:p>
           <a:p>
             <a:r>
+              <a:rPr sz="1400">
+                <a:solidFill>
+                  <a:srgbClr val="152334"/>
+                </a:solidFill>
+                <a:latin typeface="Arial"/>
+              </a:rPr>
               <a:t>  • Target: aarch64 (ARMv8-A)</a:t>
             </a:r>
           </a:p>
           <a:p>
             <a:r>
+              <a:rPr sz="1400">
+                <a:solidFill>
+                  <a:srgbClr val="152334"/>
+                </a:solidFill>
+                <a:latin typeface="Arial"/>
+              </a:rPr>
               <a:t>  • Triplet: aarch64-none-linux-gnu</a:t>
             </a:r>
           </a:p>
           <a:p/>
           <a:p>
             <a:r>
+              <a:rPr sz="1400">
+                <a:solidFill>
+                  <a:srgbClr val="152334"/>
+                </a:solidFill>
+                <a:latin typeface="Arial"/>
+              </a:rPr>
               <a:t>Components:</a:t>
             </a:r>
           </a:p>
           <a:p>
             <a:r>
+              <a:rPr sz="1400">
+                <a:solidFill>
+                  <a:srgbClr val="152334"/>
+                </a:solidFill>
+                <a:latin typeface="Arial"/>
+              </a:rPr>
               <a:t>  • aarch64-none-linux-gnu-gcc    (C compiler)</a:t>
             </a:r>
           </a:p>
           <a:p>
             <a:r>
+              <a:rPr sz="1400">
+                <a:solidFill>
+                  <a:srgbClr val="152334"/>
+                </a:solidFill>
+                <a:latin typeface="Arial"/>
+              </a:rPr>
               <a:t>  • aarch64-none-linux-gnu-g++    (C++ compiler)</a:t>
             </a:r>
           </a:p>
           <a:p>
             <a:r>
+              <a:rPr sz="1400">
+                <a:solidFill>
+                  <a:srgbClr val="152334"/>
+                </a:solidFill>
+                <a:latin typeface="Arial"/>
+              </a:rPr>
               <a:t>  • aarch64-none-linux-gnu-ld     (linker)</a:t>
             </a:r>
           </a:p>
           <a:p>
             <a:r>
+              <a:rPr sz="1400">
+                <a:solidFill>
+                  <a:srgbClr val="152334"/>
+                </a:solidFill>
+                <a:latin typeface="Arial"/>
+              </a:rPr>
               <a:t>  • aarch64-none-linux-gnu-as     (assembler)</a:t>
             </a:r>
           </a:p>
           <a:p>
             <a:r>
+              <a:rPr sz="1400">
+                <a:solidFill>
+                  <a:srgbClr val="152334"/>
+                </a:solidFill>
+                <a:latin typeface="Arial"/>
+              </a:rPr>
               <a:t>  • aarch64-none-linux-gnu-gdb    (debugger)</a:t>
             </a:r>
           </a:p>
           <a:p/>
           <a:p>
             <a:r>
+              <a:rPr sz="1400">
+                <a:solidFill>
+                  <a:srgbClr val="152334"/>
+                </a:solidFill>
+                <a:latin typeface="Arial"/>
+              </a:rPr>
               <a:t>Source: Arm GNU Toolchain</a:t>
             </a:r>
           </a:p>
           <a:p>
             <a:r>
+              <a:rPr sz="1400">
+                <a:solidFill>
+                  <a:srgbClr val="152334"/>
+                </a:solidFill>
+                <a:latin typeface="Arial"/>
+              </a:rPr>
               <a:t>  developer.arm.com/downloads</a:t>
             </a:r>
           </a:p>
           <a:p/>
           <a:p>
             <a:r>
+              <a:rPr sz="1400">
+                <a:solidFill>
+                  <a:srgbClr val="152334"/>
+                </a:solidFill>
+                <a:latin typeface="Arial"/>
+              </a:rPr>
               <a:t>Session 2: Install, verify, compile first binary</a:t>
             </a:r>
           </a:p>
@@ -6412,6 +7328,14 @@
 <file path=ppt/slides/slide15.xml><?xml version="1.0" encoding="utf-8"?>
 <p:sld xmlns:a="http://schemas.openxmlformats.org/drawingml/2006/main" xmlns:p="http://schemas.openxmlformats.org/presentationml/2006/main" xmlns:r="http://schemas.openxmlformats.org/officeDocument/2006/relationships">
   <p:cSld>
+    <p:bg>
+      <p:bgPr>
+        <a:solidFill>
+          <a:srgbClr val="F6F8FB"/>
+        </a:solidFill>
+        <a:effectLst/>
+      </p:bgPr>
+    </p:bg>
     <p:spTree>
       <p:nvGrpSpPr>
         <p:cNvPr id="1" name=""/>
@@ -6421,6 +7345,92 @@
       <p:grpSpPr/>
       <p:sp>
         <p:nvSpPr>
+          <p:cNvPr id="5" name="Rectangle 4"/>
+          <p:cNvSpPr/>
+          <p:nvPr/>
+        </p:nvSpPr>
+        <p:spPr>
+          <a:xfrm>
+            <a:off x="0" y="6756400"/>
+            <a:ext cx="9144000" cy="101600"/>
+          </a:xfrm>
+          <a:prstGeom prst="rect">
+            <a:avLst/>
+          </a:prstGeom>
+          <a:solidFill>
+            <a:srgbClr val="E8E8E8"/>
+          </a:solidFill>
+          <a:ln>
+            <a:noFill/>
+          </a:ln>
+        </p:spPr>
+        <p:style>
+          <a:lnRef idx="1">
+            <a:schemeClr val="accent1"/>
+          </a:lnRef>
+          <a:fillRef idx="3">
+            <a:schemeClr val="accent1"/>
+          </a:fillRef>
+          <a:effectRef idx="2">
+            <a:schemeClr val="accent1"/>
+          </a:effectRef>
+          <a:fontRef idx="minor">
+            <a:schemeClr val="lt1"/>
+          </a:fontRef>
+        </p:style>
+        <p:txBody>
+          <a:bodyPr rtlCol="0" anchor="ctr"/>
+          <a:lstStyle/>
+          <a:p>
+            <a:pPr algn="ctr"/>
+          </a:p>
+        </p:txBody>
+      </p:sp>
+      <p:sp>
+        <p:nvSpPr>
+          <p:cNvPr id="4" name="Rectangle 3"/>
+          <p:cNvSpPr/>
+          <p:nvPr/>
+        </p:nvSpPr>
+        <p:spPr>
+          <a:xfrm>
+            <a:off x="0" y="0"/>
+            <a:ext cx="9144000" cy="152400"/>
+          </a:xfrm>
+          <a:prstGeom prst="rect">
+            <a:avLst/>
+          </a:prstGeom>
+          <a:solidFill>
+            <a:srgbClr val="197A8C"/>
+          </a:solidFill>
+          <a:ln>
+            <a:noFill/>
+          </a:ln>
+        </p:spPr>
+        <p:style>
+          <a:lnRef idx="1">
+            <a:schemeClr val="accent1"/>
+          </a:lnRef>
+          <a:fillRef idx="3">
+            <a:schemeClr val="accent1"/>
+          </a:fillRef>
+          <a:effectRef idx="2">
+            <a:schemeClr val="accent1"/>
+          </a:effectRef>
+          <a:fontRef idx="minor">
+            <a:schemeClr val="lt1"/>
+          </a:fontRef>
+        </p:style>
+        <p:txBody>
+          <a:bodyPr rtlCol="0" anchor="ctr"/>
+          <a:lstStyle/>
+          <a:p>
+            <a:pPr algn="ctr"/>
+          </a:p>
+        </p:txBody>
+      </p:sp>
+      <p:sp>
+        <p:nvSpPr>
           <p:cNvPr id="2" name="Title 1"/>
           <p:cNvSpPr>
             <a:spLocks noGrp="1"/>
@@ -6435,6 +7445,12 @@
           <a:lstStyle/>
           <a:p>
             <a:r>
+              <a:rPr sz="3200" b="1">
+                <a:solidFill>
+                  <a:srgbClr val="152334"/>
+                </a:solidFill>
+                <a:latin typeface="Arial"/>
+              </a:rPr>
               <a:t>Bootloader Concepts</a:t>
             </a:r>
           </a:p>
@@ -6456,79 +7472,169 @@
           <a:lstStyle/>
           <a:p>
             <a:r>
+              <a:rPr sz="1400">
+                <a:solidFill>
+                  <a:srgbClr val="152334"/>
+                </a:solidFill>
+                <a:latin typeface="Arial"/>
+              </a:rPr>
               <a:t>U-Boot: Universal Boot Loader</a:t>
             </a:r>
           </a:p>
           <a:p>
             <a:r>
+              <a:rPr sz="1400">
+                <a:solidFill>
+                  <a:srgbClr val="152334"/>
+                </a:solidFill>
+                <a:latin typeface="Arial"/>
+              </a:rPr>
               <a:t>  • Standard bootloader for ARM embedded Linux</a:t>
             </a:r>
           </a:p>
           <a:p>
             <a:r>
+              <a:rPr sz="1400">
+                <a:solidFill>
+                  <a:srgbClr val="152334"/>
+                </a:solidFill>
+                <a:latin typeface="Arial"/>
+              </a:rPr>
               <a:t>  • Open source (GPL), actively maintained</a:t>
             </a:r>
           </a:p>
           <a:p/>
           <a:p>
             <a:r>
+              <a:rPr sz="1400">
+                <a:solidFill>
+                  <a:srgbClr val="152334"/>
+                </a:solidFill>
+                <a:latin typeface="Arial"/>
+              </a:rPr>
               <a:t>Boot sequence on RPi4:</a:t>
             </a:r>
           </a:p>
           <a:p>
             <a:r>
+              <a:rPr sz="1400">
+                <a:solidFill>
+                  <a:srgbClr val="152334"/>
+                </a:solidFill>
+                <a:latin typeface="Arial"/>
+              </a:rPr>
               <a:t>  1. ROM code (in SoC) — first code that runs</a:t>
             </a:r>
           </a:p>
           <a:p>
             <a:r>
+              <a:rPr sz="1400">
+                <a:solidFill>
+                  <a:srgbClr val="152334"/>
+                </a:solidFill>
+                <a:latin typeface="Arial"/>
+              </a:rPr>
               <a:t>  2. bootcode.bin (on SD card) — GPU firmware</a:t>
             </a:r>
           </a:p>
           <a:p>
             <a:r>
+              <a:rPr sz="1400">
+                <a:solidFill>
+                  <a:srgbClr val="152334"/>
+                </a:solidFill>
+                <a:latin typeface="Arial"/>
+              </a:rPr>
               <a:t>  3. start4.elf — GPU firmware, loads config.txt</a:t>
             </a:r>
           </a:p>
           <a:p>
             <a:r>
+              <a:rPr sz="1400">
+                <a:solidFill>
+                  <a:srgbClr val="152334"/>
+                </a:solidFill>
+                <a:latin typeface="Arial"/>
+              </a:rPr>
               <a:t>  4. U-Boot (or Linux kernel directly)</a:t>
             </a:r>
           </a:p>
           <a:p>
             <a:r>
+              <a:rPr sz="1400">
+                <a:solidFill>
+                  <a:srgbClr val="152334"/>
+                </a:solidFill>
+                <a:latin typeface="Arial"/>
+              </a:rPr>
               <a:t>  5. Linux kernel</a:t>
             </a:r>
           </a:p>
           <a:p/>
           <a:p>
             <a:r>
+              <a:rPr sz="1400">
+                <a:solidFill>
+                  <a:srgbClr val="152334"/>
+                </a:solidFill>
+                <a:latin typeface="Arial"/>
+              </a:rPr>
               <a:t>U-Boot provides:</a:t>
             </a:r>
           </a:p>
           <a:p>
             <a:r>
+              <a:rPr sz="1400">
+                <a:solidFill>
+                  <a:srgbClr val="152334"/>
+                </a:solidFill>
+                <a:latin typeface="Arial"/>
+              </a:rPr>
               <a:t>  • Serial console command interface</a:t>
             </a:r>
           </a:p>
           <a:p>
             <a:r>
+              <a:rPr sz="1400">
+                <a:solidFill>
+                  <a:srgbClr val="152334"/>
+                </a:solidFill>
+                <a:latin typeface="Arial"/>
+              </a:rPr>
               <a:t>  • Environment variables (bootargs)</a:t>
             </a:r>
           </a:p>
           <a:p>
             <a:r>
+              <a:rPr sz="1400">
+                <a:solidFill>
+                  <a:srgbClr val="152334"/>
+                </a:solidFill>
+                <a:latin typeface="Arial"/>
+              </a:rPr>
               <a:t>  • Storage access (SD, USB, network)</a:t>
             </a:r>
           </a:p>
           <a:p>
             <a:r>
+              <a:rPr sz="1400">
+                <a:solidFill>
+                  <a:srgbClr val="152334"/>
+                </a:solidFill>
+                <a:latin typeface="Arial"/>
+              </a:rPr>
               <a:t>  • Kernel loading and boot</a:t>
             </a:r>
           </a:p>
           <a:p/>
           <a:p>
             <a:r>
+              <a:rPr sz="1400">
+                <a:solidFill>
+                  <a:srgbClr val="152334"/>
+                </a:solidFill>
+                <a:latin typeface="Arial"/>
+              </a:rPr>
               <a:t>Session 2: Build U-Boot from source, configure boot</a:t>
             </a:r>
           </a:p>
@@ -6545,6 +7651,14 @@
 <file path=ppt/slides/slide16.xml><?xml version="1.0" encoding="utf-8"?>
 <p:sld xmlns:a="http://schemas.openxmlformats.org/drawingml/2006/main" xmlns:p="http://schemas.openxmlformats.org/presentationml/2006/main" xmlns:r="http://schemas.openxmlformats.org/officeDocument/2006/relationships">
   <p:cSld>
+    <p:bg>
+      <p:bgPr>
+        <a:solidFill>
+          <a:srgbClr val="F6F8FB"/>
+        </a:solidFill>
+        <a:effectLst/>
+      </p:bgPr>
+    </p:bg>
     <p:spTree>
       <p:nvGrpSpPr>
         <p:cNvPr id="1" name=""/>
@@ -6554,6 +7668,92 @@
       <p:grpSpPr/>
       <p:sp>
         <p:nvSpPr>
+          <p:cNvPr id="5" name="Rectangle 4"/>
+          <p:cNvSpPr/>
+          <p:nvPr/>
+        </p:nvSpPr>
+        <p:spPr>
+          <a:xfrm>
+            <a:off x="0" y="6756400"/>
+            <a:ext cx="9144000" cy="101600"/>
+          </a:xfrm>
+          <a:prstGeom prst="rect">
+            <a:avLst/>
+          </a:prstGeom>
+          <a:solidFill>
+            <a:srgbClr val="E8E8E8"/>
+          </a:solidFill>
+          <a:ln>
+            <a:noFill/>
+          </a:ln>
+        </p:spPr>
+        <p:style>
+          <a:lnRef idx="1">
+            <a:schemeClr val="accent1"/>
+          </a:lnRef>
+          <a:fillRef idx="3">
+            <a:schemeClr val="accent1"/>
+          </a:fillRef>
+          <a:effectRef idx="2">
+            <a:schemeClr val="accent1"/>
+          </a:effectRef>
+          <a:fontRef idx="minor">
+            <a:schemeClr val="lt1"/>
+          </a:fontRef>
+        </p:style>
+        <p:txBody>
+          <a:bodyPr rtlCol="0" anchor="ctr"/>
+          <a:lstStyle/>
+          <a:p>
+            <a:pPr algn="ctr"/>
+          </a:p>
+        </p:txBody>
+      </p:sp>
+      <p:sp>
+        <p:nvSpPr>
+          <p:cNvPr id="4" name="Rectangle 3"/>
+          <p:cNvSpPr/>
+          <p:nvPr/>
+        </p:nvSpPr>
+        <p:spPr>
+          <a:xfrm>
+            <a:off x="0" y="0"/>
+            <a:ext cx="9144000" cy="152400"/>
+          </a:xfrm>
+          <a:prstGeom prst="rect">
+            <a:avLst/>
+          </a:prstGeom>
+          <a:solidFill>
+            <a:srgbClr val="3D6FF6"/>
+          </a:solidFill>
+          <a:ln>
+            <a:noFill/>
+          </a:ln>
+        </p:spPr>
+        <p:style>
+          <a:lnRef idx="1">
+            <a:schemeClr val="accent1"/>
+          </a:lnRef>
+          <a:fillRef idx="3">
+            <a:schemeClr val="accent1"/>
+          </a:fillRef>
+          <a:effectRef idx="2">
+            <a:schemeClr val="accent1"/>
+          </a:effectRef>
+          <a:fontRef idx="minor">
+            <a:schemeClr val="lt1"/>
+          </a:fontRef>
+        </p:style>
+        <p:txBody>
+          <a:bodyPr rtlCol="0" anchor="ctr"/>
+          <a:lstStyle/>
+          <a:p>
+            <a:pPr algn="ctr"/>
+          </a:p>
+        </p:txBody>
+      </p:sp>
+      <p:sp>
+        <p:nvSpPr>
           <p:cNvPr id="2" name="Title 1"/>
           <p:cNvSpPr>
             <a:spLocks noGrp="1"/>
@@ -6568,6 +7768,12 @@
           <a:lstStyle/>
           <a:p>
             <a:r>
+              <a:rPr sz="3200" b="1">
+                <a:solidFill>
+                  <a:srgbClr val="152334"/>
+                </a:solidFill>
+                <a:latin typeface="Arial"/>
+              </a:rPr>
               <a:t>Kernel Configuration</a:t>
             </a:r>
           </a:p>
@@ -6589,69 +7795,147 @@
           <a:lstStyle/>
           <a:p>
             <a:r>
+              <a:rPr sz="1400">
+                <a:solidFill>
+                  <a:srgbClr val="152334"/>
+                </a:solidFill>
+                <a:latin typeface="Arial"/>
+              </a:rPr>
               <a:t>The .config file</a:t>
             </a:r>
           </a:p>
           <a:p>
             <a:r>
+              <a:rPr sz="1400">
+                <a:solidFill>
+                  <a:srgbClr val="152334"/>
+                </a:solidFill>
+                <a:latin typeface="Arial"/>
+              </a:rPr>
               <a:t>  • Defines every kernel feature, driver, and option</a:t>
             </a:r>
           </a:p>
           <a:p>
             <a:r>
+              <a:rPr sz="1400">
+                <a:solidFill>
+                  <a:srgbClr val="152334"/>
+                </a:solidFill>
+                <a:latin typeface="Arial"/>
+              </a:rPr>
               <a:t>  • Thousands of configurable items</a:t>
             </a:r>
           </a:p>
           <a:p/>
           <a:p>
             <a:r>
+              <a:rPr sz="1400">
+                <a:solidFill>
+                  <a:srgbClr val="152334"/>
+                </a:solidFill>
+                <a:latin typeface="Arial"/>
+              </a:rPr>
               <a:t>Configuration methods:</a:t>
             </a:r>
           </a:p>
           <a:p>
             <a:r>
+              <a:rPr sz="1400">
+                <a:solidFill>
+                  <a:srgbClr val="152334"/>
+                </a:solidFill>
+                <a:latin typeface="Arial"/>
+              </a:rPr>
               <a:t>  • make menuconfig  — ncurses TUI (most common)</a:t>
             </a:r>
           </a:p>
           <a:p>
             <a:r>
+              <a:rPr sz="1400">
+                <a:solidFill>
+                  <a:srgbClr val="152334"/>
+                </a:solidFill>
+                <a:latin typeface="Arial"/>
+              </a:rPr>
               <a:t>  • make xconfig     — Qt GUI</a:t>
             </a:r>
           </a:p>
           <a:p>
             <a:r>
+              <a:rPr sz="1400">
+                <a:solidFill>
+                  <a:srgbClr val="152334"/>
+                </a:solidFill>
+                <a:latin typeface="Arial"/>
+              </a:rPr>
               <a:t>  • make defconfig   — default for the architecture</a:t>
             </a:r>
           </a:p>
           <a:p>
             <a:r>
+              <a:rPr sz="1400">
+                <a:solidFill>
+                  <a:srgbClr val="152334"/>
+                </a:solidFill>
+                <a:latin typeface="Arial"/>
+              </a:rPr>
               <a:t>  • make bcm2711_defconfig — RPi4 defaults</a:t>
             </a:r>
           </a:p>
           <a:p/>
           <a:p>
             <a:r>
+              <a:rPr sz="1400">
+                <a:solidFill>
+                  <a:srgbClr val="152334"/>
+                </a:solidFill>
+                <a:latin typeface="Arial"/>
+              </a:rPr>
               <a:t>Built-in vs Module:</a:t>
             </a:r>
           </a:p>
           <a:p>
             <a:r>
+              <a:rPr sz="1400">
+                <a:solidFill>
+                  <a:srgbClr val="152334"/>
+                </a:solidFill>
+                <a:latin typeface="Arial"/>
+              </a:rPr>
               <a:t>  • =y  → Compiled into the kernel image (always present)</a:t>
             </a:r>
           </a:p>
           <a:p>
             <a:r>
+              <a:rPr sz="1400">
+                <a:solidFill>
+                  <a:srgbClr val="152334"/>
+                </a:solidFill>
+                <a:latin typeface="Arial"/>
+              </a:rPr>
               <a:t>  • =m  → Compiled as a loadable module (loaded on demand)</a:t>
             </a:r>
           </a:p>
           <a:p>
             <a:r>
+              <a:rPr sz="1400">
+                <a:solidFill>
+                  <a:srgbClr val="152334"/>
+                </a:solidFill>
+                <a:latin typeface="Arial"/>
+              </a:rPr>
               <a:t>  • =n  → Not compiled at all</a:t>
             </a:r>
           </a:p>
           <a:p/>
           <a:p>
             <a:r>
+              <a:rPr sz="1400">
+                <a:solidFill>
+                  <a:srgbClr val="152334"/>
+                </a:solidFill>
+                <a:latin typeface="Arial"/>
+              </a:rPr>
               <a:t>Session 3: Configure and build a custom kernel</a:t>
             </a:r>
           </a:p>
@@ -6668,6 +7952,14 @@
 <file path=ppt/slides/slide17.xml><?xml version="1.0" encoding="utf-8"?>
 <p:sld xmlns:a="http://schemas.openxmlformats.org/drawingml/2006/main" xmlns:p="http://schemas.openxmlformats.org/presentationml/2006/main" xmlns:r="http://schemas.openxmlformats.org/officeDocument/2006/relationships">
   <p:cSld>
+    <p:bg>
+      <p:bgPr>
+        <a:solidFill>
+          <a:srgbClr val="F6F8FB"/>
+        </a:solidFill>
+        <a:effectLst/>
+      </p:bgPr>
+    </p:bg>
     <p:spTree>
       <p:nvGrpSpPr>
         <p:cNvPr id="1" name=""/>
@@ -6677,6 +7969,92 @@
       <p:grpSpPr/>
       <p:sp>
         <p:nvSpPr>
+          <p:cNvPr id="5" name="Rectangle 4"/>
+          <p:cNvSpPr/>
+          <p:nvPr/>
+        </p:nvSpPr>
+        <p:spPr>
+          <a:xfrm>
+            <a:off x="0" y="6756400"/>
+            <a:ext cx="9144000" cy="101600"/>
+          </a:xfrm>
+          <a:prstGeom prst="rect">
+            <a:avLst/>
+          </a:prstGeom>
+          <a:solidFill>
+            <a:srgbClr val="E8E8E8"/>
+          </a:solidFill>
+          <a:ln>
+            <a:noFill/>
+          </a:ln>
+        </p:spPr>
+        <p:style>
+          <a:lnRef idx="1">
+            <a:schemeClr val="accent1"/>
+          </a:lnRef>
+          <a:fillRef idx="3">
+            <a:schemeClr val="accent1"/>
+          </a:fillRef>
+          <a:effectRef idx="2">
+            <a:schemeClr val="accent1"/>
+          </a:effectRef>
+          <a:fontRef idx="minor">
+            <a:schemeClr val="lt1"/>
+          </a:fontRef>
+        </p:style>
+        <p:txBody>
+          <a:bodyPr rtlCol="0" anchor="ctr"/>
+          <a:lstStyle/>
+          <a:p>
+            <a:pPr algn="ctr"/>
+          </a:p>
+        </p:txBody>
+      </p:sp>
+      <p:sp>
+        <p:nvSpPr>
+          <p:cNvPr id="4" name="Rectangle 3"/>
+          <p:cNvSpPr/>
+          <p:nvPr/>
+        </p:nvSpPr>
+        <p:spPr>
+          <a:xfrm>
+            <a:off x="0" y="0"/>
+            <a:ext cx="9144000" cy="152400"/>
+          </a:xfrm>
+          <a:prstGeom prst="rect">
+            <a:avLst/>
+          </a:prstGeom>
+          <a:solidFill>
+            <a:srgbClr val="F0B342"/>
+          </a:solidFill>
+          <a:ln>
+            <a:noFill/>
+          </a:ln>
+        </p:spPr>
+        <p:style>
+          <a:lnRef idx="1">
+            <a:schemeClr val="accent1"/>
+          </a:lnRef>
+          <a:fillRef idx="3">
+            <a:schemeClr val="accent1"/>
+          </a:fillRef>
+          <a:effectRef idx="2">
+            <a:schemeClr val="accent1"/>
+          </a:effectRef>
+          <a:fontRef idx="minor">
+            <a:schemeClr val="lt1"/>
+          </a:fontRef>
+        </p:style>
+        <p:txBody>
+          <a:bodyPr rtlCol="0" anchor="ctr"/>
+          <a:lstStyle/>
+          <a:p>
+            <a:pPr algn="ctr"/>
+          </a:p>
+        </p:txBody>
+      </p:sp>
+      <p:sp>
+        <p:nvSpPr>
           <p:cNvPr id="2" name="Title 1"/>
           <p:cNvSpPr>
             <a:spLocks noGrp="1"/>
@@ -6691,6 +8069,12 @@
           <a:lstStyle/>
           <a:p>
             <a:r>
+              <a:rPr sz="3200" b="1">
+                <a:solidFill>
+                  <a:srgbClr val="152334"/>
+                </a:solidFill>
+                <a:latin typeface="Arial"/>
+              </a:rPr>
               <a:t>Root Filesystem Construction</a:t>
             </a:r>
           </a:p>
@@ -6712,74 +8096,158 @@
           <a:lstStyle/>
           <a:p>
             <a:r>
+              <a:rPr sz="1400">
+                <a:solidFill>
+                  <a:srgbClr val="152334"/>
+                </a:solidFill>
+                <a:latin typeface="Arial"/>
+              </a:rPr>
               <a:t>Minimal rootfs contents:</a:t>
             </a:r>
           </a:p>
           <a:p>
             <a:r>
+              <a:rPr sz="1400">
+                <a:solidFill>
+                  <a:srgbClr val="152334"/>
+                </a:solidFill>
+                <a:latin typeface="Arial"/>
+              </a:rPr>
               <a:t>  • /sbin/init        — first userspace process</a:t>
             </a:r>
           </a:p>
           <a:p>
             <a:r>
+              <a:rPr sz="1400">
+                <a:solidFill>
+                  <a:srgbClr val="152334"/>
+                </a:solidFill>
+                <a:latin typeface="Arial"/>
+              </a:rPr>
               <a:t>  • /lib              — shared libraries (libc, libm, etc.)</a:t>
             </a:r>
           </a:p>
           <a:p>
             <a:r>
+              <a:rPr sz="1400">
+                <a:solidFill>
+                  <a:srgbClr val="152334"/>
+                </a:solidFill>
+                <a:latin typeface="Arial"/>
+              </a:rPr>
               <a:t>  • /dev              — device nodes (console, tty, null)</a:t>
             </a:r>
           </a:p>
           <a:p>
             <a:r>
+              <a:rPr sz="1400">
+                <a:solidFill>
+                  <a:srgbClr val="152334"/>
+                </a:solidFill>
+                <a:latin typeface="Arial"/>
+              </a:rPr>
               <a:t>  • /etc              — configuration files</a:t>
             </a:r>
           </a:p>
           <a:p>
             <a:r>
+              <a:rPr sz="1400">
+                <a:solidFill>
+                  <a:srgbClr val="152334"/>
+                </a:solidFill>
+                <a:latin typeface="Arial"/>
+              </a:rPr>
               <a:t>  • /proc, /sys       — kernel interfaces (mounted at boot)</a:t>
             </a:r>
           </a:p>
           <a:p/>
           <a:p>
             <a:r>
+              <a:rPr sz="1400">
+                <a:solidFill>
+                  <a:srgbClr val="152334"/>
+                </a:solidFill>
+                <a:latin typeface="Arial"/>
+              </a:rPr>
               <a:t>Init system choices:</a:t>
             </a:r>
           </a:p>
           <a:p>
             <a:r>
+              <a:rPr sz="1400">
+                <a:solidFill>
+                  <a:srgbClr val="152334"/>
+                </a:solidFill>
+                <a:latin typeface="Arial"/>
+              </a:rPr>
               <a:t>  • systemd  — full-featured, used by most distros</a:t>
             </a:r>
           </a:p>
           <a:p>
             <a:r>
+              <a:rPr sz="1400">
+                <a:solidFill>
+                  <a:srgbClr val="152334"/>
+                </a:solidFill>
+                <a:latin typeface="Arial"/>
+              </a:rPr>
               <a:t>  • BusyBox runit  — minimal, fast, common in embedded</a:t>
             </a:r>
           </a:p>
           <a:p/>
           <a:p>
             <a:r>
+              <a:rPr sz="1400">
+                <a:solidFill>
+                  <a:srgbClr val="152334"/>
+                </a:solidFill>
+                <a:latin typeface="Arial"/>
+              </a:rPr>
               <a:t>Building approaches:</a:t>
             </a:r>
           </a:p>
           <a:p>
             <a:r>
+              <a:rPr sz="1400">
+                <a:solidFill>
+                  <a:srgbClr val="152334"/>
+                </a:solidFill>
+                <a:latin typeface="Arial"/>
+              </a:rPr>
               <a:t>  • By hand — understand every file (Session 4 lab)</a:t>
             </a:r>
           </a:p>
           <a:p>
             <a:r>
+              <a:rPr sz="1400">
+                <a:solidFill>
+                  <a:srgbClr val="152334"/>
+                </a:solidFill>
+                <a:latin typeface="Arial"/>
+              </a:rPr>
               <a:t>  • Buildroot — automated, simple (Session 3)</a:t>
             </a:r>
           </a:p>
           <a:p>
             <a:r>
+              <a:rPr sz="1400">
+                <a:solidFill>
+                  <a:srgbClr val="152334"/>
+                </a:solidFill>
+                <a:latin typeface="Arial"/>
+              </a:rPr>
               <a:t>  • Yocto — automated, flexible, industry standard (Session 3)</a:t>
             </a:r>
           </a:p>
           <a:p/>
           <a:p>
             <a:r>
+              <a:rPr sz="1400">
+                <a:solidFill>
+                  <a:srgbClr val="152334"/>
+                </a:solidFill>
+                <a:latin typeface="Arial"/>
+              </a:rPr>
               <a:t>Session 3-4: Build rootfs three ways</a:t>
             </a:r>
           </a:p>
@@ -6796,6 +8264,14 @@
 <file path=ppt/slides/slide18.xml><?xml version="1.0" encoding="utf-8"?>
 <p:sld xmlns:a="http://schemas.openxmlformats.org/drawingml/2006/main" xmlns:p="http://schemas.openxmlformats.org/presentationml/2006/main" xmlns:r="http://schemas.openxmlformats.org/officeDocument/2006/relationships">
   <p:cSld>
+    <p:bg>
+      <p:bgPr>
+        <a:solidFill>
+          <a:srgbClr val="F6F8FB"/>
+        </a:solidFill>
+        <a:effectLst/>
+      </p:bgPr>
+    </p:bg>
     <p:spTree>
       <p:nvGrpSpPr>
         <p:cNvPr id="1" name=""/>
@@ -6805,6 +8281,92 @@
       <p:grpSpPr/>
       <p:sp>
         <p:nvSpPr>
+          <p:cNvPr id="5" name="Rectangle 4"/>
+          <p:cNvSpPr/>
+          <p:nvPr/>
+        </p:nvSpPr>
+        <p:spPr>
+          <a:xfrm>
+            <a:off x="0" y="6756400"/>
+            <a:ext cx="9144000" cy="101600"/>
+          </a:xfrm>
+          <a:prstGeom prst="rect">
+            <a:avLst/>
+          </a:prstGeom>
+          <a:solidFill>
+            <a:srgbClr val="E8E8E8"/>
+          </a:solidFill>
+          <a:ln>
+            <a:noFill/>
+          </a:ln>
+        </p:spPr>
+        <p:style>
+          <a:lnRef idx="1">
+            <a:schemeClr val="accent1"/>
+          </a:lnRef>
+          <a:fillRef idx="3">
+            <a:schemeClr val="accent1"/>
+          </a:fillRef>
+          <a:effectRef idx="2">
+            <a:schemeClr val="accent1"/>
+          </a:effectRef>
+          <a:fontRef idx="minor">
+            <a:schemeClr val="lt1"/>
+          </a:fontRef>
+        </p:style>
+        <p:txBody>
+          <a:bodyPr rtlCol="0" anchor="ctr"/>
+          <a:lstStyle/>
+          <a:p>
+            <a:pPr algn="ctr"/>
+          </a:p>
+        </p:txBody>
+      </p:sp>
+      <p:sp>
+        <p:nvSpPr>
+          <p:cNvPr id="4" name="Rectangle 3"/>
+          <p:cNvSpPr/>
+          <p:nvPr/>
+        </p:nvSpPr>
+        <p:spPr>
+          <a:xfrm>
+            <a:off x="0" y="0"/>
+            <a:ext cx="9144000" cy="152400"/>
+          </a:xfrm>
+          <a:prstGeom prst="rect">
+            <a:avLst/>
+          </a:prstGeom>
+          <a:solidFill>
+            <a:srgbClr val="E6862E"/>
+          </a:solidFill>
+          <a:ln>
+            <a:noFill/>
+          </a:ln>
+        </p:spPr>
+        <p:style>
+          <a:lnRef idx="1">
+            <a:schemeClr val="accent1"/>
+          </a:lnRef>
+          <a:fillRef idx="3">
+            <a:schemeClr val="accent1"/>
+          </a:fillRef>
+          <a:effectRef idx="2">
+            <a:schemeClr val="accent1"/>
+          </a:effectRef>
+          <a:fontRef idx="minor">
+            <a:schemeClr val="lt1"/>
+          </a:fontRef>
+        </p:style>
+        <p:txBody>
+          <a:bodyPr rtlCol="0" anchor="ctr"/>
+          <a:lstStyle/>
+          <a:p>
+            <a:pPr algn="ctr"/>
+          </a:p>
+        </p:txBody>
+      </p:sp>
+      <p:sp>
+        <p:nvSpPr>
           <p:cNvPr id="2" name="Title 1"/>
           <p:cNvSpPr>
             <a:spLocks noGrp="1"/>
@@ -6819,6 +8381,12 @@
           <a:lstStyle/>
           <a:p>
             <a:r>
+              <a:rPr sz="3200" b="1">
+                <a:solidFill>
+                  <a:srgbClr val="152334"/>
+                </a:solidFill>
+                <a:latin typeface="Arial"/>
+              </a:rPr>
               <a:t>Debug and Profiling Preview</a:t>
             </a:r>
           </a:p>
@@ -6840,74 +8408,158 @@
           <a:lstStyle/>
           <a:p>
             <a:r>
+              <a:rPr sz="1400">
+                <a:solidFill>
+                  <a:srgbClr val="152334"/>
+                </a:solidFill>
+                <a:latin typeface="Arial"/>
+              </a:rPr>
               <a:t>Remote GDB debugging:</a:t>
             </a:r>
           </a:p>
           <a:p>
             <a:r>
+              <a:rPr sz="1400">
+                <a:solidFill>
+                  <a:srgbClr val="152334"/>
+                </a:solidFill>
+                <a:latin typeface="Arial"/>
+              </a:rPr>
               <a:t>  • GDB runs on host, gdbserver on target</a:t>
             </a:r>
           </a:p>
           <a:p>
             <a:r>
+              <a:rPr sz="1400">
+                <a:solidFill>
+                  <a:srgbClr val="152334"/>
+                </a:solidFill>
+                <a:latin typeface="Arial"/>
+              </a:rPr>
               <a:t>  • Set breakpoints, inspect variables, step through code</a:t>
             </a:r>
           </a:p>
           <a:p>
             <a:r>
+              <a:rPr sz="1400">
+                <a:solidFill>
+                  <a:srgbClr val="152334"/>
+                </a:solidFill>
+                <a:latin typeface="Arial"/>
+              </a:rPr>
               <a:t>  • Over serial or TCP connection</a:t>
             </a:r>
           </a:p>
           <a:p/>
           <a:p>
             <a:r>
+              <a:rPr sz="1400">
+                <a:solidFill>
+                  <a:srgbClr val="152334"/>
+                </a:solidFill>
+                <a:latin typeface="Arial"/>
+              </a:rPr>
               <a:t>Serial console:</a:t>
             </a:r>
           </a:p>
           <a:p>
             <a:r>
+              <a:rPr sz="1400">
+                <a:solidFill>
+                  <a:srgbClr val="152334"/>
+                </a:solidFill>
+                <a:latin typeface="Arial"/>
+              </a:rPr>
               <a:t>  • Primary interface throughout the course</a:t>
             </a:r>
           </a:p>
           <a:p>
             <a:r>
+              <a:rPr sz="1400">
+                <a:solidFill>
+                  <a:srgbClr val="152334"/>
+                </a:solidFill>
+                <a:latin typeface="Arial"/>
+              </a:rPr>
               <a:t>  • Boot messages, U-Boot prompt, shell access</a:t>
             </a:r>
           </a:p>
           <a:p>
             <a:r>
+              <a:rPr sz="1400">
+                <a:solidFill>
+                  <a:srgbClr val="152334"/>
+                </a:solidFill>
+                <a:latin typeface="Arial"/>
+              </a:rPr>
               <a:t>  • 115200 baud, 8N1, 3.3V TTL</a:t>
             </a:r>
           </a:p>
           <a:p/>
           <a:p>
             <a:r>
+              <a:rPr sz="1400">
+                <a:solidFill>
+                  <a:srgbClr val="152334"/>
+                </a:solidFill>
+                <a:latin typeface="Arial"/>
+              </a:rPr>
               <a:t>LED blinking as first debug exercise:</a:t>
             </a:r>
           </a:p>
           <a:p>
             <a:r>
+              <a:rPr sz="1400">
+                <a:solidFill>
+                  <a:srgbClr val="152334"/>
+                </a:solidFill>
+                <a:latin typeface="Arial"/>
+              </a:rPr>
               <a:t>  • Write a C program that toggles a GPIO pin</a:t>
             </a:r>
           </a:p>
           <a:p>
             <a:r>
+              <a:rPr sz="1400">
+                <a:solidFill>
+                  <a:srgbClr val="152334"/>
+                </a:solidFill>
+                <a:latin typeface="Arial"/>
+              </a:rPr>
               <a:t>  • Wire an LED to a GPIO pin on the RPi4 header</a:t>
             </a:r>
           </a:p>
           <a:p>
             <a:r>
+              <a:rPr sz="1400">
+                <a:solidFill>
+                  <a:srgbClr val="152334"/>
+                </a:solidFill>
+                <a:latin typeface="Arial"/>
+              </a:rPr>
               <a:t>  • Cross-compile, deploy, run — verify on hardware</a:t>
             </a:r>
           </a:p>
           <a:p>
             <a:r>
+              <a:rPr sz="1400">
+                <a:solidFill>
+                  <a:srgbClr val="152334"/>
+                </a:solidFill>
+                <a:latin typeface="Arial"/>
+              </a:rPr>
               <a:t>  • If the LED blinks: your toolchain, transfer, and deployment work</a:t>
             </a:r>
           </a:p>
           <a:p/>
           <a:p>
             <a:r>
+              <a:rPr sz="1400">
+                <a:solidFill>
+                  <a:srgbClr val="152334"/>
+                </a:solidFill>
+                <a:latin typeface="Arial"/>
+              </a:rPr>
               <a:t>Session 9: Deep dive into GDB, strace, perf, ftrace</a:t>
             </a:r>
           </a:p>
@@ -6924,6 +8576,14 @@
 <file path=ppt/slides/slide19.xml><?xml version="1.0" encoding="utf-8"?>
 <p:sld xmlns:a="http://schemas.openxmlformats.org/drawingml/2006/main" xmlns:p="http://schemas.openxmlformats.org/presentationml/2006/main" xmlns:r="http://schemas.openxmlformats.org/officeDocument/2006/relationships">
   <p:cSld>
+    <p:bg>
+      <p:bgPr>
+        <a:solidFill>
+          <a:srgbClr val="F6F8FB"/>
+        </a:solidFill>
+        <a:effectLst/>
+      </p:bgPr>
+    </p:bg>
     <p:spTree>
       <p:nvGrpSpPr>
         <p:cNvPr id="1" name=""/>
@@ -6933,6 +8593,92 @@
       <p:grpSpPr/>
       <p:sp>
         <p:nvSpPr>
+          <p:cNvPr id="5" name="Rectangle 4"/>
+          <p:cNvSpPr/>
+          <p:nvPr/>
+        </p:nvSpPr>
+        <p:spPr>
+          <a:xfrm>
+            <a:off x="0" y="6756400"/>
+            <a:ext cx="9144000" cy="101600"/>
+          </a:xfrm>
+          <a:prstGeom prst="rect">
+            <a:avLst/>
+          </a:prstGeom>
+          <a:solidFill>
+            <a:srgbClr val="E8E8E8"/>
+          </a:solidFill>
+          <a:ln>
+            <a:noFill/>
+          </a:ln>
+        </p:spPr>
+        <p:style>
+          <a:lnRef idx="1">
+            <a:schemeClr val="accent1"/>
+          </a:lnRef>
+          <a:fillRef idx="3">
+            <a:schemeClr val="accent1"/>
+          </a:fillRef>
+          <a:effectRef idx="2">
+            <a:schemeClr val="accent1"/>
+          </a:effectRef>
+          <a:fontRef idx="minor">
+            <a:schemeClr val="lt1"/>
+          </a:fontRef>
+        </p:style>
+        <p:txBody>
+          <a:bodyPr rtlCol="0" anchor="ctr"/>
+          <a:lstStyle/>
+          <a:p>
+            <a:pPr algn="ctr"/>
+          </a:p>
+        </p:txBody>
+      </p:sp>
+      <p:sp>
+        <p:nvSpPr>
+          <p:cNvPr id="4" name="Rectangle 3"/>
+          <p:cNvSpPr/>
+          <p:nvPr/>
+        </p:nvSpPr>
+        <p:spPr>
+          <a:xfrm>
+            <a:off x="0" y="0"/>
+            <a:ext cx="9144000" cy="152400"/>
+          </a:xfrm>
+          <a:prstGeom prst="rect">
+            <a:avLst/>
+          </a:prstGeom>
+          <a:solidFill>
+            <a:srgbClr val="197A8C"/>
+          </a:solidFill>
+          <a:ln>
+            <a:noFill/>
+          </a:ln>
+        </p:spPr>
+        <p:style>
+          <a:lnRef idx="1">
+            <a:schemeClr val="accent1"/>
+          </a:lnRef>
+          <a:fillRef idx="3">
+            <a:schemeClr val="accent1"/>
+          </a:fillRef>
+          <a:effectRef idx="2">
+            <a:schemeClr val="accent1"/>
+          </a:effectRef>
+          <a:fontRef idx="minor">
+            <a:schemeClr val="lt1"/>
+          </a:fontRef>
+        </p:style>
+        <p:txBody>
+          <a:bodyPr rtlCol="0" anchor="ctr"/>
+          <a:lstStyle/>
+          <a:p>
+            <a:pPr algn="ctr"/>
+          </a:p>
+        </p:txBody>
+      </p:sp>
+      <p:sp>
+        <p:nvSpPr>
           <p:cNvPr id="2" name="Title 1"/>
           <p:cNvSpPr>
             <a:spLocks noGrp="1"/>
@@ -6947,6 +8693,12 @@
           <a:lstStyle/>
           <a:p>
             <a:r>
+              <a:rPr sz="3200" b="1">
+                <a:solidFill>
+                  <a:srgbClr val="152334"/>
+                </a:solidFill>
+                <a:latin typeface="Arial"/>
+              </a:rPr>
               <a:t>Lab: Flash and Boot</a:t>
             </a:r>
           </a:p>
@@ -6968,69 +8720,147 @@
           <a:lstStyle/>
           <a:p>
             <a:r>
+              <a:rPr sz="1400">
+                <a:solidFill>
+                  <a:srgbClr val="152334"/>
+                </a:solidFill>
+                <a:latin typeface="Arial"/>
+              </a:rPr>
               <a:t>Step 1: Download Raspberry Pi Imager</a:t>
             </a:r>
           </a:p>
           <a:p>
             <a:r>
+              <a:rPr sz="1400">
+                <a:solidFill>
+                  <a:srgbClr val="152334"/>
+                </a:solidFill>
+                <a:latin typeface="Arial"/>
+              </a:rPr>
               <a:t>  • rpi.io/downloads (or apt install rpi-imager)</a:t>
             </a:r>
           </a:p>
           <a:p/>
           <a:p>
             <a:r>
+              <a:rPr sz="1400">
+                <a:solidFill>
+                  <a:srgbClr val="152334"/>
+                </a:solidFill>
+                <a:latin typeface="Arial"/>
+              </a:rPr>
               <a:t>Step 2: Flash Raspberry Pi OS Lite (64-bit) to SD card</a:t>
             </a:r>
           </a:p>
           <a:p>
             <a:r>
+              <a:rPr sz="1400">
+                <a:solidFill>
+                  <a:srgbClr val="152334"/>
+                </a:solidFill>
+                <a:latin typeface="Arial"/>
+              </a:rPr>
               <a:t>  • Select OS → Raspberry Pi OS (other) → Raspberry Pi OS Lite (64-bit)</a:t>
             </a:r>
           </a:p>
           <a:p>
             <a:r>
+              <a:rPr sz="1400">
+                <a:solidFill>
+                  <a:srgbClr val="152334"/>
+                </a:solidFill>
+                <a:latin typeface="Arial"/>
+              </a:rPr>
               <a:t>  • Select SD card → Write</a:t>
             </a:r>
           </a:p>
           <a:p/>
           <a:p>
             <a:r>
+              <a:rPr sz="1400">
+                <a:solidFill>
+                  <a:srgbClr val="152334"/>
+                </a:solidFill>
+                <a:latin typeface="Arial"/>
+              </a:rPr>
               <a:t>Step 3: Boot the RPi4</a:t>
             </a:r>
           </a:p>
           <a:p>
             <a:r>
+              <a:rPr sz="1400">
+                <a:solidFill>
+                  <a:srgbClr val="152334"/>
+                </a:solidFill>
+                <a:latin typeface="Arial"/>
+              </a:rPr>
               <a:t>  • Insert SD card, connect serial cable, power on</a:t>
             </a:r>
           </a:p>
           <a:p>
             <a:r>
+              <a:rPr sz="1400">
+                <a:solidFill>
+                  <a:srgbClr val="152334"/>
+                </a:solidFill>
+                <a:latin typeface="Arial"/>
+              </a:rPr>
               <a:t>  • Open serial console: screen /dev/ttyUSB0 115200</a:t>
             </a:r>
           </a:p>
           <a:p/>
           <a:p>
             <a:r>
+              <a:rPr sz="1400">
+                <a:solidFill>
+                  <a:srgbClr val="152334"/>
+                </a:solidFill>
+                <a:latin typeface="Arial"/>
+              </a:rPr>
               <a:t>Step 4: Verify</a:t>
             </a:r>
           </a:p>
           <a:p>
             <a:r>
+              <a:rPr sz="1400">
+                <a:solidFill>
+                  <a:srgbClr val="152334"/>
+                </a:solidFill>
+                <a:latin typeface="Arial"/>
+              </a:rPr>
               <a:t>  • $ uname -a</a:t>
             </a:r>
           </a:p>
           <a:p>
             <a:r>
+              <a:rPr sz="1400">
+                <a:solidFill>
+                  <a:srgbClr val="152334"/>
+                </a:solidFill>
+                <a:latin typeface="Arial"/>
+              </a:rPr>
               <a:t>    → Linux raspberrypi 6.x.x-v8+ aarch64 GNU/Linux</a:t>
             </a:r>
           </a:p>
           <a:p>
             <a:r>
+              <a:rPr sz="1400">
+                <a:solidFill>
+                  <a:srgbClr val="152334"/>
+                </a:solidFill>
+                <a:latin typeface="Arial"/>
+              </a:rPr>
               <a:t>  • $ cat /proc/cpuinfo</a:t>
             </a:r>
           </a:p>
           <a:p>
             <a:r>
+              <a:rPr sz="1400">
+                <a:solidFill>
+                  <a:srgbClr val="152334"/>
+                </a:solidFill>
+                <a:latin typeface="Arial"/>
+              </a:rPr>
               <a:t>    → model name: Cortex-A72</a:t>
             </a:r>
           </a:p>
@@ -7047,6 +8877,14 @@
 <file path=ppt/slides/slide2.xml><?xml version="1.0" encoding="utf-8"?>
 <p:sld xmlns:a="http://schemas.openxmlformats.org/drawingml/2006/main" xmlns:p="http://schemas.openxmlformats.org/presentationml/2006/main" xmlns:r="http://schemas.openxmlformats.org/officeDocument/2006/relationships">
   <p:cSld>
+    <p:bg>
+      <p:bgPr>
+        <a:solidFill>
+          <a:srgbClr val="F6F8FB"/>
+        </a:solidFill>
+        <a:effectLst/>
+      </p:bgPr>
+    </p:bg>
     <p:spTree>
       <p:nvGrpSpPr>
         <p:cNvPr id="1" name=""/>
@@ -7056,6 +8894,92 @@
       <p:grpSpPr/>
       <p:sp>
         <p:nvSpPr>
+          <p:cNvPr id="5" name="Rectangle 4"/>
+          <p:cNvSpPr/>
+          <p:nvPr/>
+        </p:nvSpPr>
+        <p:spPr>
+          <a:xfrm>
+            <a:off x="0" y="6756400"/>
+            <a:ext cx="9144000" cy="101600"/>
+          </a:xfrm>
+          <a:prstGeom prst="rect">
+            <a:avLst/>
+          </a:prstGeom>
+          <a:solidFill>
+            <a:srgbClr val="E8E8E8"/>
+          </a:solidFill>
+          <a:ln>
+            <a:noFill/>
+          </a:ln>
+        </p:spPr>
+        <p:style>
+          <a:lnRef idx="1">
+            <a:schemeClr val="accent1"/>
+          </a:lnRef>
+          <a:fillRef idx="3">
+            <a:schemeClr val="accent1"/>
+          </a:fillRef>
+          <a:effectRef idx="2">
+            <a:schemeClr val="accent1"/>
+          </a:effectRef>
+          <a:fontRef idx="minor">
+            <a:schemeClr val="lt1"/>
+          </a:fontRef>
+        </p:style>
+        <p:txBody>
+          <a:bodyPr rtlCol="0" anchor="ctr"/>
+          <a:lstStyle/>
+          <a:p>
+            <a:pPr algn="ctr"/>
+          </a:p>
+        </p:txBody>
+      </p:sp>
+      <p:sp>
+        <p:nvSpPr>
+          <p:cNvPr id="4" name="Rectangle 3"/>
+          <p:cNvSpPr/>
+          <p:nvPr/>
+        </p:nvSpPr>
+        <p:spPr>
+          <a:xfrm>
+            <a:off x="0" y="0"/>
+            <a:ext cx="9144000" cy="152400"/>
+          </a:xfrm>
+          <a:prstGeom prst="rect">
+            <a:avLst/>
+          </a:prstGeom>
+          <a:solidFill>
+            <a:srgbClr val="E6862E"/>
+          </a:solidFill>
+          <a:ln>
+            <a:noFill/>
+          </a:ln>
+        </p:spPr>
+        <p:style>
+          <a:lnRef idx="1">
+            <a:schemeClr val="accent1"/>
+          </a:lnRef>
+          <a:fillRef idx="3">
+            <a:schemeClr val="accent1"/>
+          </a:fillRef>
+          <a:effectRef idx="2">
+            <a:schemeClr val="accent1"/>
+          </a:effectRef>
+          <a:fontRef idx="minor">
+            <a:schemeClr val="lt1"/>
+          </a:fontRef>
+        </p:style>
+        <p:txBody>
+          <a:bodyPr rtlCol="0" anchor="ctr"/>
+          <a:lstStyle/>
+          <a:p>
+            <a:pPr algn="ctr"/>
+          </a:p>
+        </p:txBody>
+      </p:sp>
+      <p:sp>
+        <p:nvSpPr>
           <p:cNvPr id="2" name="Title 1"/>
           <p:cNvSpPr>
             <a:spLocks noGrp="1"/>
@@ -7070,6 +8994,12 @@
           <a:lstStyle/>
           <a:p>
             <a:r>
+              <a:rPr sz="3200" b="1">
+                <a:solidFill>
+                  <a:srgbClr val="152334"/>
+                </a:solidFill>
+                <a:latin typeface="Arial"/>
+              </a:rPr>
               <a:t>The Course Project</a:t>
             </a:r>
           </a:p>
@@ -7091,48 +9021,102 @@
           <a:lstStyle/>
           <a:p>
             <a:r>
+              <a:rPr sz="1400">
+                <a:solidFill>
+                  <a:srgbClr val="152334"/>
+                </a:solidFill>
+                <a:latin typeface="Arial"/>
+              </a:rPr>
               <a:t>Build a bootable RPi4 system from scratch</a:t>
             </a:r>
           </a:p>
           <a:p/>
           <a:p>
             <a:r>
+              <a:rPr sz="1400">
+                <a:solidFill>
+                  <a:srgbClr val="152334"/>
+                </a:solidFill>
+                <a:latin typeface="Arial"/>
+              </a:rPr>
               <a:t>What you'll produce by Session 10:</a:t>
             </a:r>
           </a:p>
           <a:p>
             <a:r>
+              <a:rPr sz="1400">
+                <a:solidFill>
+                  <a:srgbClr val="152334"/>
+                </a:solidFill>
+                <a:latin typeface="Arial"/>
+              </a:rPr>
               <a:t>  • SD card that boots to a shell prompt on the RPi4</a:t>
             </a:r>
           </a:p>
           <a:p>
             <a:r>
+              <a:rPr sz="1400">
+                <a:solidFill>
+                  <a:srgbClr val="152334"/>
+                </a:solidFill>
+                <a:latin typeface="Arial"/>
+              </a:rPr>
               <a:t>  • Cross-compiled Linux kernel with custom configuration</a:t>
             </a:r>
           </a:p>
           <a:p>
             <a:r>
+              <a:rPr sz="1400">
+                <a:solidFill>
+                  <a:srgbClr val="152334"/>
+                </a:solidFill>
+                <a:latin typeface="Arial"/>
+              </a:rPr>
               <a:t>  • Minimal root filesystem you built yourself</a:t>
             </a:r>
           </a:p>
           <a:p>
             <a:r>
+              <a:rPr sz="1400">
+                <a:solidFill>
+                  <a:srgbClr val="152334"/>
+                </a:solidFill>
+                <a:latin typeface="Arial"/>
+              </a:rPr>
               <a:t>  • U-Boot bootloader configured and understood</a:t>
             </a:r>
           </a:p>
           <a:p>
             <a:r>
+              <a:rPr sz="1400">
+                <a:solidFill>
+                  <a:srgbClr val="152334"/>
+                </a:solidFill>
+                <a:latin typeface="Arial"/>
+              </a:rPr>
               <a:t>  • A running C application on the target</a:t>
             </a:r>
           </a:p>
           <a:p>
             <a:r>
+              <a:rPr sz="1400">
+                <a:solidFill>
+                  <a:srgbClr val="152334"/>
+                </a:solidFill>
+                <a:latin typeface="Arial"/>
+              </a:rPr>
               <a:t>  • Remote debugging via GDB over serial</a:t>
             </a:r>
           </a:p>
           <a:p/>
           <a:p>
             <a:r>
+              <a:rPr sz="1400">
+                <a:solidFill>
+                  <a:srgbClr val="152334"/>
+                </a:solidFill>
+                <a:latin typeface="Arial"/>
+              </a:rPr>
               <a:t>All built with your own toolchain, not a pre-made image.</a:t>
             </a:r>
           </a:p>
@@ -7149,6 +9133,14 @@
 <file path=ppt/slides/slide20.xml><?xml version="1.0" encoding="utf-8"?>
 <p:sld xmlns:a="http://schemas.openxmlformats.org/drawingml/2006/main" xmlns:p="http://schemas.openxmlformats.org/presentationml/2006/main" xmlns:r="http://schemas.openxmlformats.org/officeDocument/2006/relationships">
   <p:cSld>
+    <p:bg>
+      <p:bgPr>
+        <a:solidFill>
+          <a:srgbClr val="F6F8FB"/>
+        </a:solidFill>
+        <a:effectLst/>
+      </p:bgPr>
+    </p:bg>
     <p:spTree>
       <p:nvGrpSpPr>
         <p:cNvPr id="1" name=""/>
@@ -7158,6 +9150,92 @@
       <p:grpSpPr/>
       <p:sp>
         <p:nvSpPr>
+          <p:cNvPr id="5" name="Rectangle 4"/>
+          <p:cNvSpPr/>
+          <p:nvPr/>
+        </p:nvSpPr>
+        <p:spPr>
+          <a:xfrm>
+            <a:off x="0" y="6756400"/>
+            <a:ext cx="9144000" cy="101600"/>
+          </a:xfrm>
+          <a:prstGeom prst="rect">
+            <a:avLst/>
+          </a:prstGeom>
+          <a:solidFill>
+            <a:srgbClr val="E8E8E8"/>
+          </a:solidFill>
+          <a:ln>
+            <a:noFill/>
+          </a:ln>
+        </p:spPr>
+        <p:style>
+          <a:lnRef idx="1">
+            <a:schemeClr val="accent1"/>
+          </a:lnRef>
+          <a:fillRef idx="3">
+            <a:schemeClr val="accent1"/>
+          </a:fillRef>
+          <a:effectRef idx="2">
+            <a:schemeClr val="accent1"/>
+          </a:effectRef>
+          <a:fontRef idx="minor">
+            <a:schemeClr val="lt1"/>
+          </a:fontRef>
+        </p:style>
+        <p:txBody>
+          <a:bodyPr rtlCol="0" anchor="ctr"/>
+          <a:lstStyle/>
+          <a:p>
+            <a:pPr algn="ctr"/>
+          </a:p>
+        </p:txBody>
+      </p:sp>
+      <p:sp>
+        <p:nvSpPr>
+          <p:cNvPr id="4" name="Rectangle 3"/>
+          <p:cNvSpPr/>
+          <p:nvPr/>
+        </p:nvSpPr>
+        <p:spPr>
+          <a:xfrm>
+            <a:off x="0" y="0"/>
+            <a:ext cx="9144000" cy="152400"/>
+          </a:xfrm>
+          <a:prstGeom prst="rect">
+            <a:avLst/>
+          </a:prstGeom>
+          <a:solidFill>
+            <a:srgbClr val="3D6FF6"/>
+          </a:solidFill>
+          <a:ln>
+            <a:noFill/>
+          </a:ln>
+        </p:spPr>
+        <p:style>
+          <a:lnRef idx="1">
+            <a:schemeClr val="accent1"/>
+          </a:lnRef>
+          <a:fillRef idx="3">
+            <a:schemeClr val="accent1"/>
+          </a:fillRef>
+          <a:effectRef idx="2">
+            <a:schemeClr val="accent1"/>
+          </a:effectRef>
+          <a:fontRef idx="minor">
+            <a:schemeClr val="lt1"/>
+          </a:fontRef>
+        </p:style>
+        <p:txBody>
+          <a:bodyPr rtlCol="0" anchor="ctr"/>
+          <a:lstStyle/>
+          <a:p>
+            <a:pPr algn="ctr"/>
+          </a:p>
+        </p:txBody>
+      </p:sp>
+      <p:sp>
+        <p:nvSpPr>
           <p:cNvPr id="2" name="Title 1"/>
           <p:cNvSpPr>
             <a:spLocks noGrp="1"/>
@@ -7172,6 +9250,12 @@
           <a:lstStyle/>
           <a:p>
             <a:r>
+              <a:rPr sz="3200" b="1">
+                <a:solidFill>
+                  <a:srgbClr val="152334"/>
+                </a:solidFill>
+                <a:latin typeface="Arial"/>
+              </a:rPr>
               <a:t>Your First Cross-Compilation</a:t>
             </a:r>
           </a:p>
@@ -7193,79 +9277,169 @@
           <a:lstStyle/>
           <a:p>
             <a:r>
+              <a:rPr sz="1400">
+                <a:solidFill>
+                  <a:srgbClr val="152334"/>
+                </a:solidFill>
+                <a:latin typeface="Arial"/>
+              </a:rPr>
               <a:t>Write Hello World in C:</a:t>
             </a:r>
           </a:p>
           <a:p>
             <a:r>
+              <a:rPr sz="1400">
+                <a:solidFill>
+                  <a:srgbClr val="152334"/>
+                </a:solidFill>
+                <a:latin typeface="Arial"/>
+              </a:rPr>
               <a:t>  #include &lt;stdio.h&gt;</a:t>
             </a:r>
           </a:p>
           <a:p>
             <a:r>
+              <a:rPr sz="1400">
+                <a:solidFill>
+                  <a:srgbClr val="152334"/>
+                </a:solidFill>
+                <a:latin typeface="Arial"/>
+              </a:rPr>
               <a:t>  int main(void) {</a:t>
             </a:r>
           </a:p>
           <a:p>
             <a:r>
+              <a:rPr sz="1400">
+                <a:solidFill>
+                  <a:srgbClr val="152334"/>
+                </a:solidFill>
+                <a:latin typeface="Arial"/>
+              </a:rPr>
               <a:t>      printf("Hello from ARM64!\n");</a:t>
             </a:r>
           </a:p>
           <a:p>
             <a:r>
+              <a:rPr sz="1400">
+                <a:solidFill>
+                  <a:srgbClr val="152334"/>
+                </a:solidFill>
+                <a:latin typeface="Arial"/>
+              </a:rPr>
               <a:t>      return 0;</a:t>
             </a:r>
           </a:p>
           <a:p>
             <a:r>
+              <a:rPr sz="1400">
+                <a:solidFill>
+                  <a:srgbClr val="152334"/>
+                </a:solidFill>
+                <a:latin typeface="Arial"/>
+              </a:rPr>
               <a:t>  }</a:t>
             </a:r>
           </a:p>
           <a:p/>
           <a:p>
             <a:r>
+              <a:rPr sz="1400">
+                <a:solidFill>
+                  <a:srgbClr val="152334"/>
+                </a:solidFill>
+                <a:latin typeface="Arial"/>
+              </a:rPr>
               <a:t>Compile on host with system GCC:</a:t>
             </a:r>
           </a:p>
           <a:p>
             <a:r>
+              <a:rPr sz="1400">
+                <a:solidFill>
+                  <a:srgbClr val="152334"/>
+                </a:solidFill>
+                <a:latin typeface="Arial"/>
+              </a:rPr>
               <a:t>  $ gcc -o hello_x86 hello.c</a:t>
             </a:r>
           </a:p>
           <a:p>
             <a:r>
+              <a:rPr sz="1400">
+                <a:solidFill>
+                  <a:srgbClr val="152334"/>
+                </a:solidFill>
+                <a:latin typeface="Arial"/>
+              </a:rPr>
               <a:t>  $ file hello_x86</a:t>
             </a:r>
           </a:p>
           <a:p>
             <a:r>
+              <a:rPr sz="1400">
+                <a:solidFill>
+                  <a:srgbClr val="152334"/>
+                </a:solidFill>
+                <a:latin typeface="Arial"/>
+              </a:rPr>
               <a:t>  → hello_x86: ELF 64-bit LSB executable, x86-64</a:t>
             </a:r>
           </a:p>
           <a:p/>
           <a:p>
             <a:r>
+              <a:rPr sz="1400">
+                <a:solidFill>
+                  <a:srgbClr val="152334"/>
+                </a:solidFill>
+                <a:latin typeface="Arial"/>
+              </a:rPr>
               <a:t>Compile with cross-compiler:</a:t>
             </a:r>
           </a:p>
           <a:p>
             <a:r>
+              <a:rPr sz="1400">
+                <a:solidFill>
+                  <a:srgbClr val="152334"/>
+                </a:solidFill>
+                <a:latin typeface="Arial"/>
+              </a:rPr>
               <a:t>  $ aarch64-none-linux-gnu-gcc -o hello_arm hello.c</a:t>
             </a:r>
           </a:p>
           <a:p>
             <a:r>
+              <a:rPr sz="1400">
+                <a:solidFill>
+                  <a:srgbClr val="152334"/>
+                </a:solidFill>
+                <a:latin typeface="Arial"/>
+              </a:rPr>
               <a:t>  $ file hello_arm</a:t>
             </a:r>
           </a:p>
           <a:p>
             <a:r>
+              <a:rPr sz="1400">
+                <a:solidFill>
+                  <a:srgbClr val="152334"/>
+                </a:solidFill>
+                <a:latin typeface="Arial"/>
+              </a:rPr>
               <a:t>  → hello_arm: ELF 64-bit LSB executable, ARM aarch64</a:t>
             </a:r>
           </a:p>
           <a:p/>
           <a:p>
             <a:r>
+              <a:rPr sz="1400">
+                <a:solidFill>
+                  <a:srgbClr val="152334"/>
+                </a:solidFill>
+                <a:latin typeface="Arial"/>
+              </a:rPr>
               <a:t>Transfer to target and run — Session 2 lab</a:t>
             </a:r>
           </a:p>
@@ -7282,6 +9456,14 @@
 <file path=ppt/slides/slide21.xml><?xml version="1.0" encoding="utf-8"?>
 <p:sld xmlns:a="http://schemas.openxmlformats.org/drawingml/2006/main" xmlns:p="http://schemas.openxmlformats.org/presentationml/2006/main" xmlns:r="http://schemas.openxmlformats.org/officeDocument/2006/relationships">
   <p:cSld>
+    <p:bg>
+      <p:bgPr>
+        <a:solidFill>
+          <a:srgbClr val="F6F8FB"/>
+        </a:solidFill>
+        <a:effectLst/>
+      </p:bgPr>
+    </p:bg>
     <p:spTree>
       <p:nvGrpSpPr>
         <p:cNvPr id="1" name=""/>
@@ -7291,6 +9473,92 @@
       <p:grpSpPr/>
       <p:sp>
         <p:nvSpPr>
+          <p:cNvPr id="5" name="Rectangle 4"/>
+          <p:cNvSpPr/>
+          <p:nvPr/>
+        </p:nvSpPr>
+        <p:spPr>
+          <a:xfrm>
+            <a:off x="0" y="6756400"/>
+            <a:ext cx="9144000" cy="101600"/>
+          </a:xfrm>
+          <a:prstGeom prst="rect">
+            <a:avLst/>
+          </a:prstGeom>
+          <a:solidFill>
+            <a:srgbClr val="E8E8E8"/>
+          </a:solidFill>
+          <a:ln>
+            <a:noFill/>
+          </a:ln>
+        </p:spPr>
+        <p:style>
+          <a:lnRef idx="1">
+            <a:schemeClr val="accent1"/>
+          </a:lnRef>
+          <a:fillRef idx="3">
+            <a:schemeClr val="accent1"/>
+          </a:fillRef>
+          <a:effectRef idx="2">
+            <a:schemeClr val="accent1"/>
+          </a:effectRef>
+          <a:fontRef idx="minor">
+            <a:schemeClr val="lt1"/>
+          </a:fontRef>
+        </p:style>
+        <p:txBody>
+          <a:bodyPr rtlCol="0" anchor="ctr"/>
+          <a:lstStyle/>
+          <a:p>
+            <a:pPr algn="ctr"/>
+          </a:p>
+        </p:txBody>
+      </p:sp>
+      <p:sp>
+        <p:nvSpPr>
+          <p:cNvPr id="4" name="Rectangle 3"/>
+          <p:cNvSpPr/>
+          <p:nvPr/>
+        </p:nvSpPr>
+        <p:spPr>
+          <a:xfrm>
+            <a:off x="0" y="0"/>
+            <a:ext cx="9144000" cy="152400"/>
+          </a:xfrm>
+          <a:prstGeom prst="rect">
+            <a:avLst/>
+          </a:prstGeom>
+          <a:solidFill>
+            <a:srgbClr val="F0B342"/>
+          </a:solidFill>
+          <a:ln>
+            <a:noFill/>
+          </a:ln>
+        </p:spPr>
+        <p:style>
+          <a:lnRef idx="1">
+            <a:schemeClr val="accent1"/>
+          </a:lnRef>
+          <a:fillRef idx="3">
+            <a:schemeClr val="accent1"/>
+          </a:fillRef>
+          <a:effectRef idx="2">
+            <a:schemeClr val="accent1"/>
+          </a:effectRef>
+          <a:fontRef idx="minor">
+            <a:schemeClr val="lt1"/>
+          </a:fontRef>
+        </p:style>
+        <p:txBody>
+          <a:bodyPr rtlCol="0" anchor="ctr"/>
+          <a:lstStyle/>
+          <a:p>
+            <a:pPr algn="ctr"/>
+          </a:p>
+        </p:txBody>
+      </p:sp>
+      <p:sp>
+        <p:nvSpPr>
           <p:cNvPr id="2" name="Title 1"/>
           <p:cNvSpPr>
             <a:spLocks noGrp="1"/>
@@ -7305,6 +9573,12 @@
           <a:lstStyle/>
           <a:p>
             <a:r>
+              <a:rPr sz="3200" b="1">
+                <a:solidFill>
+                  <a:srgbClr val="152334"/>
+                </a:solidFill>
+                <a:latin typeface="Arial"/>
+              </a:rPr>
               <a:t>AI as Your Build Assistant</a:t>
             </a:r>
           </a:p>
@@ -7326,70 +9600,148 @@
           <a:lstStyle/>
           <a:p>
             <a:r>
+              <a:rPr sz="1400">
+                <a:solidFill>
+                  <a:srgbClr val="152334"/>
+                </a:solidFill>
+                <a:latin typeface="Arial"/>
+              </a:rPr>
               <a:t>Configure your AI coding assistant with this system prompt:</a:t>
             </a:r>
           </a:p>
           <a:p/>
           <a:p>
             <a:r>
+              <a:rPr sz="1400">
+                <a:solidFill>
+                  <a:srgbClr val="152334"/>
+                </a:solidFill>
+                <a:latin typeface="Arial"/>
+              </a:rPr>
               <a:t>You are an expert embedded Linux engineer specializing in</a:t>
             </a:r>
           </a:p>
           <a:p>
             <a:r>
+              <a:rPr sz="1400">
+                <a:solidFill>
+                  <a:srgbClr val="152334"/>
+                </a:solidFill>
+                <a:latin typeface="Arial"/>
+              </a:rPr>
               <a:t>Raspberry Pi 4 (BCM2711, Cortex-A72, aarch64) development.</a:t>
             </a:r>
           </a:p>
           <a:p>
             <a:r>
+              <a:rPr sz="1400">
+                <a:solidFill>
+                  <a:srgbClr val="152334"/>
+                </a:solidFill>
+                <a:latin typeface="Arial"/>
+              </a:rPr>
               <a:t>You help students building a custom embedded Linux system</a:t>
             </a:r>
           </a:p>
           <a:p>
             <a:r>
+              <a:rPr sz="1400">
+                <a:solidFill>
+                  <a:srgbClr val="152334"/>
+                </a:solidFill>
+                <a:latin typeface="Arial"/>
+              </a:rPr>
               <a:t>from scratch using cross-compilation.</a:t>
             </a:r>
           </a:p>
           <a:p/>
           <a:p>
             <a:r>
+              <a:rPr sz="1400">
+                <a:solidFill>
+                  <a:srgbClr val="152334"/>
+                </a:solidFill>
+                <a:latin typeface="Arial"/>
+              </a:rPr>
               <a:t>You are precise about architecture differences (ARM vs x86),</a:t>
             </a:r>
           </a:p>
           <a:p>
             <a:r>
+              <a:rPr sz="1400">
+                <a:solidFill>
+                  <a:srgbClr val="152334"/>
+                </a:solidFill>
+                <a:latin typeface="Arial"/>
+              </a:rPr>
               <a:t>toolchain details (aarch64-none-linux-gnu), boot sequence</a:t>
             </a:r>
           </a:p>
           <a:p>
             <a:r>
+              <a:rPr sz="1400">
+                <a:solidFill>
+                  <a:srgbClr val="152334"/>
+                </a:solidFill>
+                <a:latin typeface="Arial"/>
+              </a:rPr>
               <a:t>(U-Boot), and kernel configuration.</a:t>
             </a:r>
           </a:p>
           <a:p/>
           <a:p>
             <a:r>
+              <a:rPr sz="1400">
+                <a:solidFill>
+                  <a:srgbClr val="152334"/>
+                </a:solidFill>
+                <a:latin typeface="Arial"/>
+              </a:rPr>
               <a:t>When explaining build errors, always check whether the issue</a:t>
             </a:r>
           </a:p>
           <a:p>
             <a:r>
+              <a:rPr sz="1400">
+                <a:solidFill>
+                  <a:srgbClr val="152334"/>
+                </a:solidFill>
+                <a:latin typeface="Arial"/>
+              </a:rPr>
               <a:t>is host-target confusion, missing cross-compilation flags,</a:t>
             </a:r>
           </a:p>
           <a:p>
             <a:r>
+              <a:rPr sz="1400">
+                <a:solidFill>
+                  <a:srgbClr val="152334"/>
+                </a:solidFill>
+                <a:latin typeface="Arial"/>
+              </a:rPr>
               <a:t>or architecture mismatch.</a:t>
             </a:r>
           </a:p>
           <a:p/>
           <a:p>
             <a:r>
+              <a:rPr sz="1400">
+                <a:solidFill>
+                  <a:srgbClr val="152334"/>
+                </a:solidFill>
+                <a:latin typeface="Arial"/>
+              </a:rPr>
               <a:t>You encourage students to verify AI suggestions against actual</a:t>
             </a:r>
           </a:p>
           <a:p>
             <a:r>
+              <a:rPr sz="1400">
+                <a:solidFill>
+                  <a:srgbClr val="152334"/>
+                </a:solidFill>
+                <a:latin typeface="Arial"/>
+              </a:rPr>
               <a:t>hardware and never trust blindly.</a:t>
             </a:r>
           </a:p>
@@ -7406,6 +9758,14 @@
 <file path=ppt/slides/slide22.xml><?xml version="1.0" encoding="utf-8"?>
 <p:sld xmlns:a="http://schemas.openxmlformats.org/drawingml/2006/main" xmlns:p="http://schemas.openxmlformats.org/presentationml/2006/main" xmlns:r="http://schemas.openxmlformats.org/officeDocument/2006/relationships">
   <p:cSld>
+    <p:bg>
+      <p:bgPr>
+        <a:solidFill>
+          <a:srgbClr val="F6F8FB"/>
+        </a:solidFill>
+        <a:effectLst/>
+      </p:bgPr>
+    </p:bg>
     <p:spTree>
       <p:nvGrpSpPr>
         <p:cNvPr id="1" name=""/>
@@ -7415,6 +9775,92 @@
       <p:grpSpPr/>
       <p:sp>
         <p:nvSpPr>
+          <p:cNvPr id="5" name="Rectangle 4"/>
+          <p:cNvSpPr/>
+          <p:nvPr/>
+        </p:nvSpPr>
+        <p:spPr>
+          <a:xfrm>
+            <a:off x="0" y="6756400"/>
+            <a:ext cx="9144000" cy="101600"/>
+          </a:xfrm>
+          <a:prstGeom prst="rect">
+            <a:avLst/>
+          </a:prstGeom>
+          <a:solidFill>
+            <a:srgbClr val="E8E8E8"/>
+          </a:solidFill>
+          <a:ln>
+            <a:noFill/>
+          </a:ln>
+        </p:spPr>
+        <p:style>
+          <a:lnRef idx="1">
+            <a:schemeClr val="accent1"/>
+          </a:lnRef>
+          <a:fillRef idx="3">
+            <a:schemeClr val="accent1"/>
+          </a:fillRef>
+          <a:effectRef idx="2">
+            <a:schemeClr val="accent1"/>
+          </a:effectRef>
+          <a:fontRef idx="minor">
+            <a:schemeClr val="lt1"/>
+          </a:fontRef>
+        </p:style>
+        <p:txBody>
+          <a:bodyPr rtlCol="0" anchor="ctr"/>
+          <a:lstStyle/>
+          <a:p>
+            <a:pPr algn="ctr"/>
+          </a:p>
+        </p:txBody>
+      </p:sp>
+      <p:sp>
+        <p:nvSpPr>
+          <p:cNvPr id="4" name="Rectangle 3"/>
+          <p:cNvSpPr/>
+          <p:nvPr/>
+        </p:nvSpPr>
+        <p:spPr>
+          <a:xfrm>
+            <a:off x="0" y="0"/>
+            <a:ext cx="9144000" cy="152400"/>
+          </a:xfrm>
+          <a:prstGeom prst="rect">
+            <a:avLst/>
+          </a:prstGeom>
+          <a:solidFill>
+            <a:srgbClr val="E6862E"/>
+          </a:solidFill>
+          <a:ln>
+            <a:noFill/>
+          </a:ln>
+        </p:spPr>
+        <p:style>
+          <a:lnRef idx="1">
+            <a:schemeClr val="accent1"/>
+          </a:lnRef>
+          <a:fillRef idx="3">
+            <a:schemeClr val="accent1"/>
+          </a:fillRef>
+          <a:effectRef idx="2">
+            <a:schemeClr val="accent1"/>
+          </a:effectRef>
+          <a:fontRef idx="minor">
+            <a:schemeClr val="lt1"/>
+          </a:fontRef>
+        </p:style>
+        <p:txBody>
+          <a:bodyPr rtlCol="0" anchor="ctr"/>
+          <a:lstStyle/>
+          <a:p>
+            <a:pPr algn="ctr"/>
+          </a:p>
+        </p:txBody>
+      </p:sp>
+      <p:sp>
+        <p:nvSpPr>
           <p:cNvPr id="2" name="Title 1"/>
           <p:cNvSpPr>
             <a:spLocks noGrp="1"/>
@@ -7429,6 +9875,12 @@
           <a:lstStyle/>
           <a:p>
             <a:r>
+              <a:rPr sz="3200" b="1">
+                <a:solidFill>
+                  <a:srgbClr val="152334"/>
+                </a:solidFill>
+                <a:latin typeface="Arial"/>
+              </a:rPr>
               <a:t>Summary and Preview</a:t>
             </a:r>
           </a:p>
@@ -7450,88 +9902,190 @@
           <a:lstStyle/>
           <a:p>
             <a:r>
+              <a:rPr sz="1400">
+                <a:solidFill>
+                  <a:srgbClr val="152334"/>
+                </a:solidFill>
+                <a:latin typeface="Arial"/>
+              </a:rPr>
               <a:t>Today we covered:</a:t>
             </a:r>
           </a:p>
           <a:p>
             <a:r>
+              <a:rPr sz="1400">
+                <a:solidFill>
+                  <a:srgbClr val="152334"/>
+                </a:solidFill>
+                <a:latin typeface="Arial"/>
+              </a:rPr>
               <a:t>  • The course project: build a bootable RPi4 from scratch</a:t>
             </a:r>
           </a:p>
           <a:p>
             <a:r>
+              <a:rPr sz="1400">
+                <a:solidFill>
+                  <a:srgbClr val="152334"/>
+                </a:solidFill>
+                <a:latin typeface="Arial"/>
+              </a:rPr>
               <a:t>  • The embedded Linux architecture stack</a:t>
             </a:r>
           </a:p>
           <a:p>
             <a:r>
+              <a:rPr sz="1400">
+                <a:solidFill>
+                  <a:srgbClr val="152334"/>
+                </a:solidFill>
+                <a:latin typeface="Arial"/>
+              </a:rPr>
               <a:t>  • Cross-development workflow</a:t>
             </a:r>
           </a:p>
           <a:p>
             <a:r>
+              <a:rPr sz="1400">
+                <a:solidFill>
+                  <a:srgbClr val="152334"/>
+                </a:solidFill>
+                <a:latin typeface="Arial"/>
+              </a:rPr>
               <a:t>  • The 10-session roadmap</a:t>
             </a:r>
           </a:p>
           <a:p>
             <a:r>
+              <a:rPr sz="1400">
+                <a:solidFill>
+                  <a:srgbClr val="152334"/>
+                </a:solidFill>
+                <a:latin typeface="Arial"/>
+              </a:rPr>
               <a:t>  • AI integration throughout the course</a:t>
             </a:r>
           </a:p>
           <a:p>
             <a:r>
+              <a:rPr sz="1400">
+                <a:solidFill>
+                  <a:srgbClr val="152334"/>
+                </a:solidFill>
+                <a:latin typeface="Arial"/>
+              </a:rPr>
               <a:t>  • First lab: flash SD card and boot RPi4</a:t>
             </a:r>
           </a:p>
           <a:p/>
           <a:p>
             <a:r>
+              <a:rPr sz="1400">
+                <a:solidFill>
+                  <a:srgbClr val="152334"/>
+                </a:solidFill>
+                <a:latin typeface="Arial"/>
+              </a:rPr>
               <a:t>Next session — Session 2: Toolchains &amp; Bootloaders</a:t>
             </a:r>
           </a:p>
           <a:p>
             <a:r>
+              <a:rPr sz="1400">
+                <a:solidFill>
+                  <a:srgbClr val="152334"/>
+                </a:solidFill>
+                <a:latin typeface="Arial"/>
+              </a:rPr>
               <a:t>  • Install the Arm GNU Toolchain</a:t>
             </a:r>
           </a:p>
           <a:p>
             <a:r>
+              <a:rPr sz="1400">
+                <a:solidFill>
+                  <a:srgbClr val="152334"/>
+                </a:solidFill>
+                <a:latin typeface="Arial"/>
+              </a:rPr>
               <a:t>  • Build U-Boot from source</a:t>
             </a:r>
           </a:p>
           <a:p>
             <a:r>
+              <a:rPr sz="1400">
+                <a:solidFill>
+                  <a:srgbClr val="152334"/>
+                </a:solidFill>
+                <a:latin typeface="Arial"/>
+              </a:rPr>
               <a:t>  • Understand the RPi4 boot sequence</a:t>
             </a:r>
           </a:p>
           <a:p>
             <a:r>
+              <a:rPr sz="1400">
+                <a:solidFill>
+                  <a:srgbClr val="152334"/>
+                </a:solidFill>
+                <a:latin typeface="Arial"/>
+              </a:rPr>
               <a:t>  • First cross-compilation lab</a:t>
             </a:r>
           </a:p>
           <a:p>
             <a:r>
+              <a:rPr sz="1400">
+                <a:solidFill>
+                  <a:srgbClr val="152334"/>
+                </a:solidFill>
+                <a:latin typeface="Arial"/>
+              </a:rPr>
               <a:t>  • Configure AI assistant with embedded Linux persona</a:t>
             </a:r>
           </a:p>
           <a:p/>
           <a:p>
             <a:r>
+              <a:rPr sz="1400">
+                <a:solidFill>
+                  <a:srgbClr val="152334"/>
+                </a:solidFill>
+                <a:latin typeface="Arial"/>
+              </a:rPr>
               <a:t>Before next session:</a:t>
             </a:r>
           </a:p>
           <a:p>
             <a:r>
+              <a:rPr sz="1400">
+                <a:solidFill>
+                  <a:srgbClr val="152334"/>
+                </a:solidFill>
+                <a:latin typeface="Arial"/>
+              </a:rPr>
               <a:t>  • Complete the flash-and-boot lab</a:t>
             </a:r>
           </a:p>
           <a:p>
             <a:r>
+              <a:rPr sz="1400">
+                <a:solidFill>
+                  <a:srgbClr val="152334"/>
+                </a:solidFill>
+                <a:latin typeface="Arial"/>
+              </a:rPr>
               <a:t>  • Install the Arm GNU Toolchain on your workstation</a:t>
             </a:r>
           </a:p>
           <a:p>
             <a:r>
+              <a:rPr sz="1400">
+                <a:solidFill>
+                  <a:srgbClr val="152334"/>
+                </a:solidFill>
+                <a:latin typeface="Arial"/>
+              </a:rPr>
               <a:t>  • Bring your RPi4, serial cable, and SD card to class</a:t>
             </a:r>
           </a:p>
@@ -7548,6 +10102,14 @@
 <file path=ppt/slides/slide3.xml><?xml version="1.0" encoding="utf-8"?>
 <p:sld xmlns:a="http://schemas.openxmlformats.org/drawingml/2006/main" xmlns:p="http://schemas.openxmlformats.org/presentationml/2006/main" xmlns:r="http://schemas.openxmlformats.org/officeDocument/2006/relationships">
   <p:cSld>
+    <p:bg>
+      <p:bgPr>
+        <a:solidFill>
+          <a:srgbClr val="F6F8FB"/>
+        </a:solidFill>
+        <a:effectLst/>
+      </p:bgPr>
+    </p:bg>
     <p:spTree>
       <p:nvGrpSpPr>
         <p:cNvPr id="1" name=""/>
@@ -7557,6 +10119,92 @@
       <p:grpSpPr/>
       <p:sp>
         <p:nvSpPr>
+          <p:cNvPr id="5" name="Rectangle 4"/>
+          <p:cNvSpPr/>
+          <p:nvPr/>
+        </p:nvSpPr>
+        <p:spPr>
+          <a:xfrm>
+            <a:off x="0" y="6756400"/>
+            <a:ext cx="9144000" cy="101600"/>
+          </a:xfrm>
+          <a:prstGeom prst="rect">
+            <a:avLst/>
+          </a:prstGeom>
+          <a:solidFill>
+            <a:srgbClr val="E8E8E8"/>
+          </a:solidFill>
+          <a:ln>
+            <a:noFill/>
+          </a:ln>
+        </p:spPr>
+        <p:style>
+          <a:lnRef idx="1">
+            <a:schemeClr val="accent1"/>
+          </a:lnRef>
+          <a:fillRef idx="3">
+            <a:schemeClr val="accent1"/>
+          </a:fillRef>
+          <a:effectRef idx="2">
+            <a:schemeClr val="accent1"/>
+          </a:effectRef>
+          <a:fontRef idx="minor">
+            <a:schemeClr val="lt1"/>
+          </a:fontRef>
+        </p:style>
+        <p:txBody>
+          <a:bodyPr rtlCol="0" anchor="ctr"/>
+          <a:lstStyle/>
+          <a:p>
+            <a:pPr algn="ctr"/>
+          </a:p>
+        </p:txBody>
+      </p:sp>
+      <p:sp>
+        <p:nvSpPr>
+          <p:cNvPr id="4" name="Rectangle 3"/>
+          <p:cNvSpPr/>
+          <p:nvPr/>
+        </p:nvSpPr>
+        <p:spPr>
+          <a:xfrm>
+            <a:off x="0" y="0"/>
+            <a:ext cx="9144000" cy="152400"/>
+          </a:xfrm>
+          <a:prstGeom prst="rect">
+            <a:avLst/>
+          </a:prstGeom>
+          <a:solidFill>
+            <a:srgbClr val="197A8C"/>
+          </a:solidFill>
+          <a:ln>
+            <a:noFill/>
+          </a:ln>
+        </p:spPr>
+        <p:style>
+          <a:lnRef idx="1">
+            <a:schemeClr val="accent1"/>
+          </a:lnRef>
+          <a:fillRef idx="3">
+            <a:schemeClr val="accent1"/>
+          </a:fillRef>
+          <a:effectRef idx="2">
+            <a:schemeClr val="accent1"/>
+          </a:effectRef>
+          <a:fontRef idx="minor">
+            <a:schemeClr val="lt1"/>
+          </a:fontRef>
+        </p:style>
+        <p:txBody>
+          <a:bodyPr rtlCol="0" anchor="ctr"/>
+          <a:lstStyle/>
+          <a:p>
+            <a:pPr algn="ctr"/>
+          </a:p>
+        </p:txBody>
+      </p:sp>
+      <p:sp>
+        <p:nvSpPr>
           <p:cNvPr id="2" name="Title 1"/>
           <p:cNvSpPr>
             <a:spLocks noGrp="1"/>
@@ -7571,6 +10219,12 @@
           <a:lstStyle/>
           <a:p>
             <a:r>
+              <a:rPr sz="3200" b="1">
+                <a:solidFill>
+                  <a:srgbClr val="152334"/>
+                </a:solidFill>
+                <a:latin typeface="Arial"/>
+              </a:rPr>
               <a:t>What "From Scratch" Means</a:t>
             </a:r>
           </a:p>
@@ -7592,55 +10246,115 @@
           <a:lstStyle/>
           <a:p>
             <a:r>
+              <a:rPr sz="1400">
+                <a:solidFill>
+                  <a:srgbClr val="152334"/>
+                </a:solidFill>
+                <a:latin typeface="Arial"/>
+              </a:rPr>
               <a:t>Cross-compile the kernel</a:t>
             </a:r>
           </a:p>
           <a:p>
             <a:r>
+              <a:rPr sz="1400">
+                <a:solidFill>
+                  <a:srgbClr val="152334"/>
+                </a:solidFill>
+                <a:latin typeface="Arial"/>
+              </a:rPr>
               <a:t>  — Build on x86, run on ARM64 (aarch64)</a:t>
             </a:r>
           </a:p>
           <a:p/>
           <a:p>
             <a:r>
+              <a:rPr sz="1400">
+                <a:solidFill>
+                  <a:srgbClr val="152334"/>
+                </a:solidFill>
+                <a:latin typeface="Arial"/>
+              </a:rPr>
               <a:t>Build the root filesystem</a:t>
             </a:r>
           </a:p>
           <a:p>
             <a:r>
+              <a:rPr sz="1400">
+                <a:solidFill>
+                  <a:srgbClr val="152334"/>
+                </a:solidFill>
+                <a:latin typeface="Arial"/>
+              </a:rPr>
               <a:t>  — Select libraries, init system, device nodes</a:t>
             </a:r>
           </a:p>
           <a:p/>
           <a:p>
             <a:r>
+              <a:rPr sz="1400">
+                <a:solidFill>
+                  <a:srgbClr val="152334"/>
+                </a:solidFill>
+                <a:latin typeface="Arial"/>
+              </a:rPr>
               <a:t>Configure the bootloader</a:t>
             </a:r>
           </a:p>
           <a:p>
             <a:r>
+              <a:rPr sz="1400">
+                <a:solidFill>
+                  <a:srgbClr val="152334"/>
+                </a:solidFill>
+                <a:latin typeface="Arial"/>
+              </a:rPr>
               <a:t>  — U-Boot: boot sequence, environment variables</a:t>
             </a:r>
           </a:p>
           <a:p/>
           <a:p>
             <a:r>
+              <a:rPr sz="1400">
+                <a:solidFill>
+                  <a:srgbClr val="152334"/>
+                </a:solidFill>
+                <a:latin typeface="Arial"/>
+              </a:rPr>
               <a:t>Write and deploy an application</a:t>
             </a:r>
           </a:p>
           <a:p>
             <a:r>
+              <a:rPr sz="1400">
+                <a:solidFill>
+                  <a:srgbClr val="152334"/>
+                </a:solidFill>
+                <a:latin typeface="Arial"/>
+              </a:rPr>
               <a:t>  — C program, cross-compiled, transferred to target</a:t>
             </a:r>
           </a:p>
           <a:p/>
           <a:p>
             <a:r>
+              <a:rPr sz="1400">
+                <a:solidFill>
+                  <a:srgbClr val="152334"/>
+                </a:solidFill>
+                <a:latin typeface="Arial"/>
+              </a:rPr>
               <a:t>Debug on real hardware</a:t>
             </a:r>
           </a:p>
           <a:p>
             <a:r>
+              <a:rPr sz="1400">
+                <a:solidFill>
+                  <a:srgbClr val="152334"/>
+                </a:solidFill>
+                <a:latin typeface="Arial"/>
+              </a:rPr>
               <a:t>  — Serial console, remote GDB, LED blinking</a:t>
             </a:r>
           </a:p>
@@ -7657,6 +10371,14 @@
 <file path=ppt/slides/slide4.xml><?xml version="1.0" encoding="utf-8"?>
 <p:sld xmlns:a="http://schemas.openxmlformats.org/drawingml/2006/main" xmlns:p="http://schemas.openxmlformats.org/presentationml/2006/main" xmlns:r="http://schemas.openxmlformats.org/officeDocument/2006/relationships">
   <p:cSld>
+    <p:bg>
+      <p:bgPr>
+        <a:solidFill>
+          <a:srgbClr val="F6F8FB"/>
+        </a:solidFill>
+        <a:effectLst/>
+      </p:bgPr>
+    </p:bg>
     <p:spTree>
       <p:nvGrpSpPr>
         <p:cNvPr id="1" name=""/>
@@ -7666,6 +10388,92 @@
       <p:grpSpPr/>
       <p:sp>
         <p:nvSpPr>
+          <p:cNvPr id="5" name="Rectangle 4"/>
+          <p:cNvSpPr/>
+          <p:nvPr/>
+        </p:nvSpPr>
+        <p:spPr>
+          <a:xfrm>
+            <a:off x="0" y="6756400"/>
+            <a:ext cx="9144000" cy="101600"/>
+          </a:xfrm>
+          <a:prstGeom prst="rect">
+            <a:avLst/>
+          </a:prstGeom>
+          <a:solidFill>
+            <a:srgbClr val="E8E8E8"/>
+          </a:solidFill>
+          <a:ln>
+            <a:noFill/>
+          </a:ln>
+        </p:spPr>
+        <p:style>
+          <a:lnRef idx="1">
+            <a:schemeClr val="accent1"/>
+          </a:lnRef>
+          <a:fillRef idx="3">
+            <a:schemeClr val="accent1"/>
+          </a:fillRef>
+          <a:effectRef idx="2">
+            <a:schemeClr val="accent1"/>
+          </a:effectRef>
+          <a:fontRef idx="minor">
+            <a:schemeClr val="lt1"/>
+          </a:fontRef>
+        </p:style>
+        <p:txBody>
+          <a:bodyPr rtlCol="0" anchor="ctr"/>
+          <a:lstStyle/>
+          <a:p>
+            <a:pPr algn="ctr"/>
+          </a:p>
+        </p:txBody>
+      </p:sp>
+      <p:sp>
+        <p:nvSpPr>
+          <p:cNvPr id="4" name="Rectangle 3"/>
+          <p:cNvSpPr/>
+          <p:nvPr/>
+        </p:nvSpPr>
+        <p:spPr>
+          <a:xfrm>
+            <a:off x="0" y="0"/>
+            <a:ext cx="9144000" cy="152400"/>
+          </a:xfrm>
+          <a:prstGeom prst="rect">
+            <a:avLst/>
+          </a:prstGeom>
+          <a:solidFill>
+            <a:srgbClr val="3D6FF6"/>
+          </a:solidFill>
+          <a:ln>
+            <a:noFill/>
+          </a:ln>
+        </p:spPr>
+        <p:style>
+          <a:lnRef idx="1">
+            <a:schemeClr val="accent1"/>
+          </a:lnRef>
+          <a:fillRef idx="3">
+            <a:schemeClr val="accent1"/>
+          </a:fillRef>
+          <a:effectRef idx="2">
+            <a:schemeClr val="accent1"/>
+          </a:effectRef>
+          <a:fontRef idx="minor">
+            <a:schemeClr val="lt1"/>
+          </a:fontRef>
+        </p:style>
+        <p:txBody>
+          <a:bodyPr rtlCol="0" anchor="ctr"/>
+          <a:lstStyle/>
+          <a:p>
+            <a:pPr algn="ctr"/>
+          </a:p>
+        </p:txBody>
+      </p:sp>
+      <p:sp>
+        <p:nvSpPr>
           <p:cNvPr id="2" name="Title 1"/>
           <p:cNvSpPr>
             <a:spLocks noGrp="1"/>
@@ -7680,6 +10488,12 @@
           <a:lstStyle/>
           <a:p>
             <a:r>
+              <a:rPr sz="3200" b="1">
+                <a:solidFill>
+                  <a:srgbClr val="152334"/>
+                </a:solidFill>
+                <a:latin typeface="Arial"/>
+              </a:rPr>
               <a:t>The 10-Session Roadmap</a:t>
             </a:r>
           </a:p>
@@ -7701,57 +10515,123 @@
           <a:lstStyle/>
           <a:p>
             <a:r>
+              <a:rPr sz="1400">
+                <a:solidFill>
+                  <a:srgbClr val="152334"/>
+                </a:solidFill>
+                <a:latin typeface="Arial"/>
+              </a:rPr>
               <a:t>Session 1  →  Introduction &amp; First Boot  [YOU ARE HERE]</a:t>
             </a:r>
           </a:p>
           <a:p>
             <a:r>
+              <a:rPr sz="1400">
+                <a:solidFill>
+                  <a:srgbClr val="152334"/>
+                </a:solidFill>
+                <a:latin typeface="Arial"/>
+              </a:rPr>
               <a:t>Session 2  →  Toolchains &amp; Bootloaders</a:t>
             </a:r>
           </a:p>
           <a:p>
             <a:r>
+              <a:rPr sz="1400">
+                <a:solidFill>
+                  <a:srgbClr val="152334"/>
+                </a:solidFill>
+                <a:latin typeface="Arial"/>
+              </a:rPr>
               <a:t>Session 3  →  Yocto &amp; Buildroot</a:t>
             </a:r>
           </a:p>
           <a:p>
             <a:r>
+              <a:rPr sz="1400">
+                <a:solidFill>
+                  <a:srgbClr val="152334"/>
+                </a:solidFill>
+                <a:latin typeface="Arial"/>
+              </a:rPr>
               <a:t>Session 4  →  System Architecture &amp; Storage</a:t>
             </a:r>
           </a:p>
           <a:p>
             <a:r>
+              <a:rPr sz="1400">
+                <a:solidFill>
+                  <a:srgbClr val="152334"/>
+                </a:solidFill>
+                <a:latin typeface="Arial"/>
+              </a:rPr>
               <a:t>Session 5  →  Linux Kernel Overview</a:t>
             </a:r>
           </a:p>
           <a:p>
             <a:r>
+              <a:rPr sz="1400">
+                <a:solidFill>
+                  <a:srgbClr val="152334"/>
+                </a:solidFill>
+                <a:latin typeface="Arial"/>
+              </a:rPr>
               <a:t>Session 6  →  Kernel Architecture &amp; Device Trees</a:t>
             </a:r>
           </a:p>
           <a:p>
             <a:r>
+              <a:rPr sz="1400">
+                <a:solidFill>
+                  <a:srgbClr val="152334"/>
+                </a:solidFill>
+                <a:latin typeface="Arial"/>
+              </a:rPr>
               <a:t>Session 7  →  Systems Programming</a:t>
             </a:r>
           </a:p>
           <a:p>
             <a:r>
+              <a:rPr sz="1400">
+                <a:solidFill>
+                  <a:srgbClr val="152334"/>
+                </a:solidFill>
+                <a:latin typeface="Arial"/>
+              </a:rPr>
               <a:t>Session 8  →  Embedded Applications</a:t>
             </a:r>
           </a:p>
           <a:p>
             <a:r>
+              <a:rPr sz="1400">
+                <a:solidFill>
+                  <a:srgbClr val="152334"/>
+                </a:solidFill>
+                <a:latin typeface="Arial"/>
+              </a:rPr>
               <a:t>Session 9  →  Debug &amp; Profiling</a:t>
             </a:r>
           </a:p>
           <a:p>
             <a:r>
+              <a:rPr sz="1400">
+                <a:solidFill>
+                  <a:srgbClr val="152334"/>
+                </a:solidFill>
+                <a:latin typeface="Arial"/>
+              </a:rPr>
               <a:t>Session 10 →  Realtime Systems</a:t>
             </a:r>
           </a:p>
           <a:p/>
           <a:p>
             <a:r>
+              <a:rPr sz="1400">
+                <a:solidFill>
+                  <a:srgbClr val="152334"/>
+                </a:solidFill>
+                <a:latin typeface="Arial"/>
+              </a:rPr>
               <a:t>Each session maps to a layer in the build pipeline.</a:t>
             </a:r>
           </a:p>
@@ -7768,6 +10648,14 @@
 <file path=ppt/slides/slide5.xml><?xml version="1.0" encoding="utf-8"?>
 <p:sld xmlns:a="http://schemas.openxmlformats.org/drawingml/2006/main" xmlns:p="http://schemas.openxmlformats.org/presentationml/2006/main" xmlns:r="http://schemas.openxmlformats.org/officeDocument/2006/relationships">
   <p:cSld>
+    <p:bg>
+      <p:bgPr>
+        <a:solidFill>
+          <a:srgbClr val="F6F8FB"/>
+        </a:solidFill>
+        <a:effectLst/>
+      </p:bgPr>
+    </p:bg>
     <p:spTree>
       <p:nvGrpSpPr>
         <p:cNvPr id="1" name=""/>
@@ -7777,6 +10665,92 @@
       <p:grpSpPr/>
       <p:sp>
         <p:nvSpPr>
+          <p:cNvPr id="5" name="Rectangle 4"/>
+          <p:cNvSpPr/>
+          <p:nvPr/>
+        </p:nvSpPr>
+        <p:spPr>
+          <a:xfrm>
+            <a:off x="0" y="6756400"/>
+            <a:ext cx="9144000" cy="101600"/>
+          </a:xfrm>
+          <a:prstGeom prst="rect">
+            <a:avLst/>
+          </a:prstGeom>
+          <a:solidFill>
+            <a:srgbClr val="E8E8E8"/>
+          </a:solidFill>
+          <a:ln>
+            <a:noFill/>
+          </a:ln>
+        </p:spPr>
+        <p:style>
+          <a:lnRef idx="1">
+            <a:schemeClr val="accent1"/>
+          </a:lnRef>
+          <a:fillRef idx="3">
+            <a:schemeClr val="accent1"/>
+          </a:fillRef>
+          <a:effectRef idx="2">
+            <a:schemeClr val="accent1"/>
+          </a:effectRef>
+          <a:fontRef idx="minor">
+            <a:schemeClr val="lt1"/>
+          </a:fontRef>
+        </p:style>
+        <p:txBody>
+          <a:bodyPr rtlCol="0" anchor="ctr"/>
+          <a:lstStyle/>
+          <a:p>
+            <a:pPr algn="ctr"/>
+          </a:p>
+        </p:txBody>
+      </p:sp>
+      <p:sp>
+        <p:nvSpPr>
+          <p:cNvPr id="4" name="Rectangle 3"/>
+          <p:cNvSpPr/>
+          <p:nvPr/>
+        </p:nvSpPr>
+        <p:spPr>
+          <a:xfrm>
+            <a:off x="0" y="0"/>
+            <a:ext cx="9144000" cy="152400"/>
+          </a:xfrm>
+          <a:prstGeom prst="rect">
+            <a:avLst/>
+          </a:prstGeom>
+          <a:solidFill>
+            <a:srgbClr val="F0B342"/>
+          </a:solidFill>
+          <a:ln>
+            <a:noFill/>
+          </a:ln>
+        </p:spPr>
+        <p:style>
+          <a:lnRef idx="1">
+            <a:schemeClr val="accent1"/>
+          </a:lnRef>
+          <a:fillRef idx="3">
+            <a:schemeClr val="accent1"/>
+          </a:fillRef>
+          <a:effectRef idx="2">
+            <a:schemeClr val="accent1"/>
+          </a:effectRef>
+          <a:fontRef idx="minor">
+            <a:schemeClr val="lt1"/>
+          </a:fontRef>
+        </p:style>
+        <p:txBody>
+          <a:bodyPr rtlCol="0" anchor="ctr"/>
+          <a:lstStyle/>
+          <a:p>
+            <a:pPr algn="ctr"/>
+          </a:p>
+        </p:txBody>
+      </p:sp>
+      <p:sp>
+        <p:nvSpPr>
           <p:cNvPr id="2" name="Title 1"/>
           <p:cNvSpPr>
             <a:spLocks noGrp="1"/>
@@ -7791,6 +10765,12 @@
           <a:lstStyle/>
           <a:p>
             <a:r>
+              <a:rPr sz="3200" b="1">
+                <a:solidFill>
+                  <a:srgbClr val="152334"/>
+                </a:solidFill>
+                <a:latin typeface="Arial"/>
+              </a:rPr>
               <a:t>What You Need</a:t>
             </a:r>
           </a:p>
@@ -7812,63 +10792,135 @@
           <a:lstStyle/>
           <a:p>
             <a:r>
+              <a:rPr sz="1400">
+                <a:solidFill>
+                  <a:srgbClr val="152334"/>
+                </a:solidFill>
+                <a:latin typeface="Arial"/>
+              </a:rPr>
               <a:t>Hardware:</a:t>
             </a:r>
           </a:p>
           <a:p>
             <a:r>
+              <a:rPr sz="1400">
+                <a:solidFill>
+                  <a:srgbClr val="152334"/>
+                </a:solidFill>
+                <a:latin typeface="Arial"/>
+              </a:rPr>
               <a:t>  • Raspberry Pi 4 Model B (2GB+ RAM)</a:t>
             </a:r>
           </a:p>
           <a:p>
             <a:r>
+              <a:rPr sz="1400">
+                <a:solidFill>
+                  <a:srgbClr val="152334"/>
+                </a:solidFill>
+                <a:latin typeface="Arial"/>
+              </a:rPr>
               <a:t>  • MicroSD card (16GB+, Class 10)</a:t>
             </a:r>
           </a:p>
           <a:p>
             <a:r>
+              <a:rPr sz="1400">
+                <a:solidFill>
+                  <a:srgbClr val="152334"/>
+                </a:solidFill>
+                <a:latin typeface="Arial"/>
+              </a:rPr>
               <a:t>  • USB-to-TTL serial cable (3.3V, e.g., FTDI FT232R)</a:t>
             </a:r>
           </a:p>
           <a:p>
             <a:r>
+              <a:rPr sz="1400">
+                <a:solidFill>
+                  <a:srgbClr val="152334"/>
+                </a:solidFill>
+                <a:latin typeface="Arial"/>
+              </a:rPr>
               <a:t>  • Ethernet cable or WiFi for your network</a:t>
             </a:r>
           </a:p>
           <a:p>
             <a:r>
+              <a:rPr sz="1400">
+                <a:solidFill>
+                  <a:srgbClr val="152334"/>
+                </a:solidFill>
+                <a:latin typeface="Arial"/>
+              </a:rPr>
               <a:t>  • 5V USB-C power supply for RPi4</a:t>
             </a:r>
           </a:p>
           <a:p/>
           <a:p>
             <a:r>
+              <a:rPr sz="1400">
+                <a:solidFill>
+                  <a:srgbClr val="152334"/>
+                </a:solidFill>
+                <a:latin typeface="Arial"/>
+              </a:rPr>
               <a:t>Prerequisites:</a:t>
             </a:r>
           </a:p>
           <a:p>
             <a:r>
+              <a:rPr sz="1400">
+                <a:solidFill>
+                  <a:srgbClr val="152334"/>
+                </a:solidFill>
+                <a:latin typeface="Arial"/>
+              </a:rPr>
               <a:t>  • C/C++ programming (comfortable)</a:t>
             </a:r>
           </a:p>
           <a:p>
             <a:r>
+              <a:rPr sz="1400">
+                <a:solidFill>
+                  <a:srgbClr val="152334"/>
+                </a:solidFill>
+                <a:latin typeface="Arial"/>
+              </a:rPr>
               <a:t>  • Linux command line (basic navigation, file ops)</a:t>
             </a:r>
           </a:p>
           <a:p>
             <a:r>
+              <a:rPr sz="1400">
+                <a:solidFill>
+                  <a:srgbClr val="152334"/>
+                </a:solidFill>
+                <a:latin typeface="Arial"/>
+              </a:rPr>
               <a:t>  • Bare-metal/embedded experience (helpful, not required)</a:t>
             </a:r>
           </a:p>
           <a:p>
             <a:r>
+              <a:rPr sz="1400">
+                <a:solidFill>
+                  <a:srgbClr val="152334"/>
+                </a:solidFill>
+                <a:latin typeface="Arial"/>
+              </a:rPr>
               <a:t>  • AI for Programmers session (completed)</a:t>
             </a:r>
           </a:p>
           <a:p/>
           <a:p>
             <a:r>
+              <a:rPr sz="1400">
+                <a:solidFill>
+                  <a:srgbClr val="152334"/>
+                </a:solidFill>
+                <a:latin typeface="Arial"/>
+              </a:rPr>
               <a:t>Software: Linux workstation (Ubuntu 22.04+ recommended)</a:t>
             </a:r>
           </a:p>
@@ -7885,6 +10937,14 @@
 <file path=ppt/slides/slide6.xml><?xml version="1.0" encoding="utf-8"?>
 <p:sld xmlns:a="http://schemas.openxmlformats.org/drawingml/2006/main" xmlns:p="http://schemas.openxmlformats.org/presentationml/2006/main" xmlns:r="http://schemas.openxmlformats.org/officeDocument/2006/relationships">
   <p:cSld>
+    <p:bg>
+      <p:bgPr>
+        <a:solidFill>
+          <a:srgbClr val="F6F8FB"/>
+        </a:solidFill>
+        <a:effectLst/>
+      </p:bgPr>
+    </p:bg>
     <p:spTree>
       <p:nvGrpSpPr>
         <p:cNvPr id="1" name=""/>
@@ -7894,6 +10954,92 @@
       <p:grpSpPr/>
       <p:sp>
         <p:nvSpPr>
+          <p:cNvPr id="5" name="Rectangle 4"/>
+          <p:cNvSpPr/>
+          <p:nvPr/>
+        </p:nvSpPr>
+        <p:spPr>
+          <a:xfrm>
+            <a:off x="0" y="6756400"/>
+            <a:ext cx="9144000" cy="101600"/>
+          </a:xfrm>
+          <a:prstGeom prst="rect">
+            <a:avLst/>
+          </a:prstGeom>
+          <a:solidFill>
+            <a:srgbClr val="E8E8E8"/>
+          </a:solidFill>
+          <a:ln>
+            <a:noFill/>
+          </a:ln>
+        </p:spPr>
+        <p:style>
+          <a:lnRef idx="1">
+            <a:schemeClr val="accent1"/>
+          </a:lnRef>
+          <a:fillRef idx="3">
+            <a:schemeClr val="accent1"/>
+          </a:fillRef>
+          <a:effectRef idx="2">
+            <a:schemeClr val="accent1"/>
+          </a:effectRef>
+          <a:fontRef idx="minor">
+            <a:schemeClr val="lt1"/>
+          </a:fontRef>
+        </p:style>
+        <p:txBody>
+          <a:bodyPr rtlCol="0" anchor="ctr"/>
+          <a:lstStyle/>
+          <a:p>
+            <a:pPr algn="ctr"/>
+          </a:p>
+        </p:txBody>
+      </p:sp>
+      <p:sp>
+        <p:nvSpPr>
+          <p:cNvPr id="4" name="Rectangle 3"/>
+          <p:cNvSpPr/>
+          <p:nvPr/>
+        </p:nvSpPr>
+        <p:spPr>
+          <a:xfrm>
+            <a:off x="0" y="0"/>
+            <a:ext cx="9144000" cy="152400"/>
+          </a:xfrm>
+          <a:prstGeom prst="rect">
+            <a:avLst/>
+          </a:prstGeom>
+          <a:solidFill>
+            <a:srgbClr val="E6862E"/>
+          </a:solidFill>
+          <a:ln>
+            <a:noFill/>
+          </a:ln>
+        </p:spPr>
+        <p:style>
+          <a:lnRef idx="1">
+            <a:schemeClr val="accent1"/>
+          </a:lnRef>
+          <a:fillRef idx="3">
+            <a:schemeClr val="accent1"/>
+          </a:fillRef>
+          <a:effectRef idx="2">
+            <a:schemeClr val="accent1"/>
+          </a:effectRef>
+          <a:fontRef idx="minor">
+            <a:schemeClr val="lt1"/>
+          </a:fontRef>
+        </p:style>
+        <p:txBody>
+          <a:bodyPr rtlCol="0" anchor="ctr"/>
+          <a:lstStyle/>
+          <a:p>
+            <a:pPr algn="ctr"/>
+          </a:p>
+        </p:txBody>
+      </p:sp>
+      <p:sp>
+        <p:nvSpPr>
           <p:cNvPr id="2" name="Title 1"/>
           <p:cNvSpPr>
             <a:spLocks noGrp="1"/>
@@ -7908,6 +11054,12 @@
           <a:lstStyle/>
           <a:p>
             <a:r>
+              <a:rPr sz="3200" b="1">
+                <a:solidFill>
+                  <a:srgbClr val="152334"/>
+                </a:solidFill>
+                <a:latin typeface="Arial"/>
+              </a:rPr>
               <a:t>What Makes Embedded Linux Different</a:t>
             </a:r>
           </a:p>
@@ -7929,66 +11081,138 @@
           <a:lstStyle/>
           <a:p>
             <a:r>
+              <a:rPr sz="1400">
+                <a:solidFill>
+                  <a:srgbClr val="152334"/>
+                </a:solidFill>
+                <a:latin typeface="Arial"/>
+              </a:rPr>
               <a:t>Constrained resources</a:t>
             </a:r>
           </a:p>
           <a:p>
             <a:r>
+              <a:rPr sz="1400">
+                <a:solidFill>
+                  <a:srgbClr val="152334"/>
+                </a:solidFill>
+                <a:latin typeface="Arial"/>
+              </a:rPr>
               <a:t>  — Limited RAM, flash, CPU compared to servers</a:t>
             </a:r>
           </a:p>
           <a:p/>
           <a:p>
             <a:r>
+              <a:rPr sz="1400">
+                <a:solidFill>
+                  <a:srgbClr val="152334"/>
+                </a:solidFill>
+                <a:latin typeface="Arial"/>
+              </a:rPr>
               <a:t>Cross-development is mandatory</a:t>
             </a:r>
           </a:p>
           <a:p>
             <a:r>
+              <a:rPr sz="1400">
+                <a:solidFill>
+                  <a:srgbClr val="152334"/>
+                </a:solidFill>
+                <a:latin typeface="Arial"/>
+              </a:rPr>
               <a:t>  — Target can't build its own software</a:t>
             </a:r>
           </a:p>
           <a:p/>
           <a:p>
             <a:r>
+              <a:rPr sz="1400">
+                <a:solidFill>
+                  <a:srgbClr val="152334"/>
+                </a:solidFill>
+                <a:latin typeface="Arial"/>
+              </a:rPr>
               <a:t>Boot process is explicit and configurable</a:t>
             </a:r>
           </a:p>
           <a:p>
             <a:r>
+              <a:rPr sz="1400">
+                <a:solidFill>
+                  <a:srgbClr val="152334"/>
+                </a:solidFill>
+                <a:latin typeface="Arial"/>
+              </a:rPr>
               <a:t>  — No BIOS/UEFI hand-holding; you control every step</a:t>
             </a:r>
           </a:p>
           <a:p/>
           <a:p>
             <a:r>
+              <a:rPr sz="1400">
+                <a:solidFill>
+                  <a:srgbClr val="152334"/>
+                </a:solidFill>
+                <a:latin typeface="Arial"/>
+              </a:rPr>
               <a:t>No GUI by default</a:t>
             </a:r>
           </a:p>
           <a:p>
             <a:r>
+              <a:rPr sz="1400">
+                <a:solidFill>
+                  <a:srgbClr val="152334"/>
+                </a:solidFill>
+                <a:latin typeface="Arial"/>
+              </a:rPr>
               <a:t>  • Serial console is the primary interface</a:t>
             </a:r>
           </a:p>
           <a:p/>
           <a:p>
             <a:r>
+              <a:rPr sz="1400">
+                <a:solidFill>
+                  <a:srgbClr val="152334"/>
+                </a:solidFill>
+                <a:latin typeface="Arial"/>
+              </a:rPr>
               <a:t>Hardware-specific configuration</a:t>
             </a:r>
           </a:p>
           <a:p>
             <a:r>
+              <a:rPr sz="1400">
+                <a:solidFill>
+                  <a:srgbClr val="152334"/>
+                </a:solidFill>
+                <a:latin typeface="Arial"/>
+              </a:rPr>
               <a:t>  — Device trees describe the board to the kernel</a:t>
             </a:r>
           </a:p>
           <a:p/>
           <a:p>
             <a:r>
+              <a:rPr sz="1400">
+                <a:solidFill>
+                  <a:srgbClr val="152334"/>
+                </a:solidFill>
+                <a:latin typeface="Arial"/>
+              </a:rPr>
               <a:t>Updates are deliberate</a:t>
             </a:r>
           </a:p>
           <a:p>
             <a:r>
+              <a:rPr sz="1400">
+                <a:solidFill>
+                  <a:srgbClr val="152334"/>
+                </a:solidFill>
+                <a:latin typeface="Arial"/>
+              </a:rPr>
               <a:t>  — OTA updates must be designed, not assumed</a:t>
             </a:r>
           </a:p>
@@ -8005,6 +11229,14 @@
 <file path=ppt/slides/slide7.xml><?xml version="1.0" encoding="utf-8"?>
 <p:sld xmlns:a="http://schemas.openxmlformats.org/drawingml/2006/main" xmlns:p="http://schemas.openxmlformats.org/presentationml/2006/main" xmlns:r="http://schemas.openxmlformats.org/officeDocument/2006/relationships">
   <p:cSld>
+    <p:bg>
+      <p:bgPr>
+        <a:solidFill>
+          <a:srgbClr val="F6F8FB"/>
+        </a:solidFill>
+        <a:effectLst/>
+      </p:bgPr>
+    </p:bg>
     <p:spTree>
       <p:nvGrpSpPr>
         <p:cNvPr id="1" name=""/>
@@ -8014,6 +11246,92 @@
       <p:grpSpPr/>
       <p:sp>
         <p:nvSpPr>
+          <p:cNvPr id="5" name="Rectangle 4"/>
+          <p:cNvSpPr/>
+          <p:nvPr/>
+        </p:nvSpPr>
+        <p:spPr>
+          <a:xfrm>
+            <a:off x="0" y="6756400"/>
+            <a:ext cx="9144000" cy="101600"/>
+          </a:xfrm>
+          <a:prstGeom prst="rect">
+            <a:avLst/>
+          </a:prstGeom>
+          <a:solidFill>
+            <a:srgbClr val="E8E8E8"/>
+          </a:solidFill>
+          <a:ln>
+            <a:noFill/>
+          </a:ln>
+        </p:spPr>
+        <p:style>
+          <a:lnRef idx="1">
+            <a:schemeClr val="accent1"/>
+          </a:lnRef>
+          <a:fillRef idx="3">
+            <a:schemeClr val="accent1"/>
+          </a:fillRef>
+          <a:effectRef idx="2">
+            <a:schemeClr val="accent1"/>
+          </a:effectRef>
+          <a:fontRef idx="minor">
+            <a:schemeClr val="lt1"/>
+          </a:fontRef>
+        </p:style>
+        <p:txBody>
+          <a:bodyPr rtlCol="0" anchor="ctr"/>
+          <a:lstStyle/>
+          <a:p>
+            <a:pPr algn="ctr"/>
+          </a:p>
+        </p:txBody>
+      </p:sp>
+      <p:sp>
+        <p:nvSpPr>
+          <p:cNvPr id="4" name="Rectangle 3"/>
+          <p:cNvSpPr/>
+          <p:nvPr/>
+        </p:nvSpPr>
+        <p:spPr>
+          <a:xfrm>
+            <a:off x="0" y="0"/>
+            <a:ext cx="9144000" cy="152400"/>
+          </a:xfrm>
+          <a:prstGeom prst="rect">
+            <a:avLst/>
+          </a:prstGeom>
+          <a:solidFill>
+            <a:srgbClr val="197A8C"/>
+          </a:solidFill>
+          <a:ln>
+            <a:noFill/>
+          </a:ln>
+        </p:spPr>
+        <p:style>
+          <a:lnRef idx="1">
+            <a:schemeClr val="accent1"/>
+          </a:lnRef>
+          <a:fillRef idx="3">
+            <a:schemeClr val="accent1"/>
+          </a:fillRef>
+          <a:effectRef idx="2">
+            <a:schemeClr val="accent1"/>
+          </a:effectRef>
+          <a:fontRef idx="minor">
+            <a:schemeClr val="lt1"/>
+          </a:fontRef>
+        </p:style>
+        <p:txBody>
+          <a:bodyPr rtlCol="0" anchor="ctr"/>
+          <a:lstStyle/>
+          <a:p>
+            <a:pPr algn="ctr"/>
+          </a:p>
+        </p:txBody>
+      </p:sp>
+      <p:sp>
+        <p:nvSpPr>
           <p:cNvPr id="2" name="Title 1"/>
           <p:cNvSpPr>
             <a:spLocks noGrp="1"/>
@@ -8028,6 +11346,12 @@
           <a:lstStyle/>
           <a:p>
             <a:r>
+              <a:rPr sz="3200" b="1">
+                <a:solidFill>
+                  <a:srgbClr val="152334"/>
+                </a:solidFill>
+                <a:latin typeface="Arial"/>
+              </a:rPr>
               <a:t>The Embedded Linux Architecture Stack</a:t>
             </a:r>
           </a:p>
@@ -8049,62 +11373,134 @@
           <a:lstStyle/>
           <a:p>
             <a:r>
+              <a:rPr sz="1400">
+                <a:solidFill>
+                  <a:srgbClr val="152334"/>
+                </a:solidFill>
+                <a:latin typeface="Arial"/>
+              </a:rPr>
               <a:t>┌─────────────────────────────┐</a:t>
             </a:r>
           </a:p>
           <a:p>
             <a:r>
+              <a:rPr sz="1400">
+                <a:solidFill>
+                  <a:srgbClr val="152334"/>
+                </a:solidFill>
+                <a:latin typeface="Arial"/>
+              </a:rPr>
               <a:t>│       Application           │  ← Your code</a:t>
             </a:r>
           </a:p>
           <a:p>
             <a:r>
+              <a:rPr sz="1400">
+                <a:solidFill>
+                  <a:srgbClr val="152334"/>
+                </a:solidFill>
+                <a:latin typeface="Arial"/>
+              </a:rPr>
               <a:t>├─────────────────────────────┤</a:t>
             </a:r>
           </a:p>
           <a:p>
             <a:r>
+              <a:rPr sz="1400">
+                <a:solidFill>
+                  <a:srgbClr val="152334"/>
+                </a:solidFill>
+                <a:latin typeface="Arial"/>
+              </a:rPr>
               <a:t>│       Root Filesystem       │  ← Libraries, init, config</a:t>
             </a:r>
           </a:p>
           <a:p>
             <a:r>
+              <a:rPr sz="1400">
+                <a:solidFill>
+                  <a:srgbClr val="152334"/>
+                </a:solidFill>
+                <a:latin typeface="Arial"/>
+              </a:rPr>
               <a:t>├─────────────────────────────┤</a:t>
             </a:r>
           </a:p>
           <a:p>
             <a:r>
+              <a:rPr sz="1400">
+                <a:solidFill>
+                  <a:srgbClr val="152334"/>
+                </a:solidFill>
+                <a:latin typeface="Arial"/>
+              </a:rPr>
               <a:t>│       Linux Kernel          │  ← Drivers, scheduling, MM</a:t>
             </a:r>
           </a:p>
           <a:p>
             <a:r>
+              <a:rPr sz="1400">
+                <a:solidFill>
+                  <a:srgbClr val="152334"/>
+                </a:solidFill>
+                <a:latin typeface="Arial"/>
+              </a:rPr>
               <a:t>├─────────────────────────────┤</a:t>
             </a:r>
           </a:p>
           <a:p>
             <a:r>
+              <a:rPr sz="1400">
+                <a:solidFill>
+                  <a:srgbClr val="152334"/>
+                </a:solidFill>
+                <a:latin typeface="Arial"/>
+              </a:rPr>
               <a:t>│       Bootloader (U-Boot)   │  ← HW init, kernel load</a:t>
             </a:r>
           </a:p>
           <a:p>
             <a:r>
+              <a:rPr sz="1400">
+                <a:solidFill>
+                  <a:srgbClr val="152334"/>
+                </a:solidFill>
+                <a:latin typeface="Arial"/>
+              </a:rPr>
               <a:t>├─────────────────────────────┤</a:t>
             </a:r>
           </a:p>
           <a:p>
             <a:r>
+              <a:rPr sz="1400">
+                <a:solidFill>
+                  <a:srgbClr val="152334"/>
+                </a:solidFill>
+                <a:latin typeface="Arial"/>
+              </a:rPr>
               <a:t>│       Hardware (RPi4)       │  ← BCM2711, Cortex-A72</a:t>
             </a:r>
           </a:p>
           <a:p>
             <a:r>
+              <a:rPr sz="1400">
+                <a:solidFill>
+                  <a:srgbClr val="152334"/>
+                </a:solidFill>
+                <a:latin typeface="Arial"/>
+              </a:rPr>
               <a:t>└─────────────────────────────┘</a:t>
             </a:r>
           </a:p>
           <a:p/>
           <a:p>
             <a:r>
+              <a:rPr sz="1400">
+                <a:solidFill>
+                  <a:srgbClr val="152334"/>
+                </a:solidFill>
+                <a:latin typeface="Arial"/>
+              </a:rPr>
               <a:t>Each layer is a course topic. We build bottom-up.</a:t>
             </a:r>
           </a:p>
@@ -8121,6 +11517,14 @@
 <file path=ppt/slides/slide8.xml><?xml version="1.0" encoding="utf-8"?>
 <p:sld xmlns:a="http://schemas.openxmlformats.org/drawingml/2006/main" xmlns:p="http://schemas.openxmlformats.org/presentationml/2006/main" xmlns:r="http://schemas.openxmlformats.org/officeDocument/2006/relationships">
   <p:cSld>
+    <p:bg>
+      <p:bgPr>
+        <a:solidFill>
+          <a:srgbClr val="F6F8FB"/>
+        </a:solidFill>
+        <a:effectLst/>
+      </p:bgPr>
+    </p:bg>
     <p:spTree>
       <p:nvGrpSpPr>
         <p:cNvPr id="1" name=""/>
@@ -8130,6 +11534,92 @@
       <p:grpSpPr/>
       <p:sp>
         <p:nvSpPr>
+          <p:cNvPr id="5" name="Rectangle 4"/>
+          <p:cNvSpPr/>
+          <p:nvPr/>
+        </p:nvSpPr>
+        <p:spPr>
+          <a:xfrm>
+            <a:off x="0" y="6756400"/>
+            <a:ext cx="9144000" cy="101600"/>
+          </a:xfrm>
+          <a:prstGeom prst="rect">
+            <a:avLst/>
+          </a:prstGeom>
+          <a:solidFill>
+            <a:srgbClr val="E8E8E8"/>
+          </a:solidFill>
+          <a:ln>
+            <a:noFill/>
+          </a:ln>
+        </p:spPr>
+        <p:style>
+          <a:lnRef idx="1">
+            <a:schemeClr val="accent1"/>
+          </a:lnRef>
+          <a:fillRef idx="3">
+            <a:schemeClr val="accent1"/>
+          </a:fillRef>
+          <a:effectRef idx="2">
+            <a:schemeClr val="accent1"/>
+          </a:effectRef>
+          <a:fontRef idx="minor">
+            <a:schemeClr val="lt1"/>
+          </a:fontRef>
+        </p:style>
+        <p:txBody>
+          <a:bodyPr rtlCol="0" anchor="ctr"/>
+          <a:lstStyle/>
+          <a:p>
+            <a:pPr algn="ctr"/>
+          </a:p>
+        </p:txBody>
+      </p:sp>
+      <p:sp>
+        <p:nvSpPr>
+          <p:cNvPr id="4" name="Rectangle 3"/>
+          <p:cNvSpPr/>
+          <p:nvPr/>
+        </p:nvSpPr>
+        <p:spPr>
+          <a:xfrm>
+            <a:off x="0" y="0"/>
+            <a:ext cx="9144000" cy="152400"/>
+          </a:xfrm>
+          <a:prstGeom prst="rect">
+            <a:avLst/>
+          </a:prstGeom>
+          <a:solidFill>
+            <a:srgbClr val="3D6FF6"/>
+          </a:solidFill>
+          <a:ln>
+            <a:noFill/>
+          </a:ln>
+        </p:spPr>
+        <p:style>
+          <a:lnRef idx="1">
+            <a:schemeClr val="accent1"/>
+          </a:lnRef>
+          <a:fillRef idx="3">
+            <a:schemeClr val="accent1"/>
+          </a:fillRef>
+          <a:effectRef idx="2">
+            <a:schemeClr val="accent1"/>
+          </a:effectRef>
+          <a:fontRef idx="minor">
+            <a:schemeClr val="lt1"/>
+          </a:fontRef>
+        </p:style>
+        <p:txBody>
+          <a:bodyPr rtlCol="0" anchor="ctr"/>
+          <a:lstStyle/>
+          <a:p>
+            <a:pPr algn="ctr"/>
+          </a:p>
+        </p:txBody>
+      </p:sp>
+      <p:sp>
+        <p:nvSpPr>
           <p:cNvPr id="2" name="Title 1"/>
           <p:cNvSpPr>
             <a:spLocks noGrp="1"/>
@@ -8144,6 +11634,12 @@
           <a:lstStyle/>
           <a:p>
             <a:r>
+              <a:rPr sz="3200" b="1">
+                <a:solidFill>
+                  <a:srgbClr val="152334"/>
+                </a:solidFill>
+                <a:latin typeface="Arial"/>
+              </a:rPr>
               <a:t>Why Linux for Embedded</a:t>
             </a:r>
           </a:p>
@@ -8165,71 +11661,149 @@
           <a:lstStyle/>
           <a:p>
             <a:r>
+              <a:rPr sz="1400">
+                <a:solidFill>
+                  <a:srgbClr val="152334"/>
+                </a:solidFill>
+                <a:latin typeface="Arial"/>
+              </a:rPr>
               <a:t>Open source — full source code access</a:t>
             </a:r>
           </a:p>
           <a:p>
             <a:r>
+              <a:rPr sz="1400">
+                <a:solidFill>
+                  <a:srgbClr val="152334"/>
+                </a:solidFill>
+                <a:latin typeface="Arial"/>
+              </a:rPr>
               <a:t>  • Modify kernel, drivers, bootloader freely</a:t>
             </a:r>
           </a:p>
           <a:p/>
           <a:p>
             <a:r>
+              <a:rPr sz="1400">
+                <a:solidFill>
+                  <a:srgbClr val="152334"/>
+                </a:solidFill>
+                <a:latin typeface="Arial"/>
+              </a:rPr>
               <a:t>Massive hardware support</a:t>
             </a:r>
           </a:p>
           <a:p>
             <a:r>
+              <a:rPr sz="1400">
+                <a:solidFill>
+                  <a:srgbClr val="152334"/>
+                </a:solidFill>
+                <a:latin typeface="Arial"/>
+              </a:rPr>
               <a:t>  • Mainline kernel supports RPi4, NXP, TI, Microchip...</a:t>
             </a:r>
           </a:p>
           <a:p/>
           <a:p>
             <a:r>
+              <a:rPr sz="1400">
+                <a:solidFill>
+                  <a:srgbClr val="152334"/>
+                </a:solidFill>
+                <a:latin typeface="Arial"/>
+              </a:rPr>
               <a:t>Rich driver ecosystem</a:t>
             </a:r>
           </a:p>
           <a:p>
             <a:r>
+              <a:rPr sz="1400">
+                <a:solidFill>
+                  <a:srgbClr val="152334"/>
+                </a:solidFill>
+                <a:latin typeface="Arial"/>
+              </a:rPr>
               <a:t>  • USB, networking, GPU, SPI, I2C, UART — all upstream</a:t>
             </a:r>
           </a:p>
           <a:p/>
           <a:p>
             <a:r>
+              <a:rPr sz="1400">
+                <a:solidFill>
+                  <a:srgbClr val="152334"/>
+                </a:solidFill>
+                <a:latin typeface="Arial"/>
+              </a:rPr>
               <a:t>Mature toolchain</a:t>
             </a:r>
           </a:p>
           <a:p>
             <a:r>
+              <a:rPr sz="1400">
+                <a:solidFill>
+                  <a:srgbClr val="152334"/>
+                </a:solidFill>
+                <a:latin typeface="Arial"/>
+              </a:rPr>
               <a:t>  • GCC, GDB, binutils — production quality, decades of use</a:t>
             </a:r>
           </a:p>
           <a:p/>
           <a:p>
             <a:r>
+              <a:rPr sz="1400">
+                <a:solidFill>
+                  <a:srgbClr val="152334"/>
+                </a:solidFill>
+                <a:latin typeface="Arial"/>
+              </a:rPr>
               <a:t>Community and documentation</a:t>
             </a:r>
           </a:p>
           <a:p>
             <a:r>
+              <a:rPr sz="1400">
+                <a:solidFill>
+                  <a:srgbClr val="152334"/>
+                </a:solidFill>
+                <a:latin typeface="Arial"/>
+              </a:rPr>
               <a:t>  • Kernel docs, Bootlin training, LWN articles</a:t>
             </a:r>
           </a:p>
           <a:p/>
           <a:p>
             <a:r>
+              <a:rPr sz="1400">
+                <a:solidFill>
+                  <a:srgbClr val="152334"/>
+                </a:solidFill>
+                <a:latin typeface="Arial"/>
+              </a:rPr>
               <a:t>GPL licensing implications</a:t>
             </a:r>
           </a:p>
           <a:p>
             <a:r>
+              <a:rPr sz="1400">
+                <a:solidFill>
+                  <a:srgbClr val="152334"/>
+                </a:solidFill>
+                <a:latin typeface="Arial"/>
+              </a:rPr>
               <a:t>  • Kernel modifications must be shared if distributed</a:t>
             </a:r>
           </a:p>
           <a:p>
             <a:r>
+              <a:rPr sz="1400">
+                <a:solidFill>
+                  <a:srgbClr val="152334"/>
+                </a:solidFill>
+                <a:latin typeface="Arial"/>
+              </a:rPr>
               <a:t>  • Userspace (LGPL, BSD, MIT) is more permissive</a:t>
             </a:r>
           </a:p>
@@ -8246,6 +11820,14 @@
 <file path=ppt/slides/slide9.xml><?xml version="1.0" encoding="utf-8"?>
 <p:sld xmlns:a="http://schemas.openxmlformats.org/drawingml/2006/main" xmlns:p="http://schemas.openxmlformats.org/presentationml/2006/main" xmlns:r="http://schemas.openxmlformats.org/officeDocument/2006/relationships">
   <p:cSld>
+    <p:bg>
+      <p:bgPr>
+        <a:solidFill>
+          <a:srgbClr val="F6F8FB"/>
+        </a:solidFill>
+        <a:effectLst/>
+      </p:bgPr>
+    </p:bg>
     <p:spTree>
       <p:nvGrpSpPr>
         <p:cNvPr id="1" name=""/>
@@ -8255,6 +11837,92 @@
       <p:grpSpPr/>
       <p:sp>
         <p:nvSpPr>
+          <p:cNvPr id="5" name="Rectangle 4"/>
+          <p:cNvSpPr/>
+          <p:nvPr/>
+        </p:nvSpPr>
+        <p:spPr>
+          <a:xfrm>
+            <a:off x="0" y="6756400"/>
+            <a:ext cx="9144000" cy="101600"/>
+          </a:xfrm>
+          <a:prstGeom prst="rect">
+            <a:avLst/>
+          </a:prstGeom>
+          <a:solidFill>
+            <a:srgbClr val="E8E8E8"/>
+          </a:solidFill>
+          <a:ln>
+            <a:noFill/>
+          </a:ln>
+        </p:spPr>
+        <p:style>
+          <a:lnRef idx="1">
+            <a:schemeClr val="accent1"/>
+          </a:lnRef>
+          <a:fillRef idx="3">
+            <a:schemeClr val="accent1"/>
+          </a:fillRef>
+          <a:effectRef idx="2">
+            <a:schemeClr val="accent1"/>
+          </a:effectRef>
+          <a:fontRef idx="minor">
+            <a:schemeClr val="lt1"/>
+          </a:fontRef>
+        </p:style>
+        <p:txBody>
+          <a:bodyPr rtlCol="0" anchor="ctr"/>
+          <a:lstStyle/>
+          <a:p>
+            <a:pPr algn="ctr"/>
+          </a:p>
+        </p:txBody>
+      </p:sp>
+      <p:sp>
+        <p:nvSpPr>
+          <p:cNvPr id="4" name="Rectangle 3"/>
+          <p:cNvSpPr/>
+          <p:nvPr/>
+        </p:nvSpPr>
+        <p:spPr>
+          <a:xfrm>
+            <a:off x="0" y="0"/>
+            <a:ext cx="9144000" cy="152400"/>
+          </a:xfrm>
+          <a:prstGeom prst="rect">
+            <a:avLst/>
+          </a:prstGeom>
+          <a:solidFill>
+            <a:srgbClr val="F0B342"/>
+          </a:solidFill>
+          <a:ln>
+            <a:noFill/>
+          </a:ln>
+        </p:spPr>
+        <p:style>
+          <a:lnRef idx="1">
+            <a:schemeClr val="accent1"/>
+          </a:lnRef>
+          <a:fillRef idx="3">
+            <a:schemeClr val="accent1"/>
+          </a:fillRef>
+          <a:effectRef idx="2">
+            <a:schemeClr val="accent1"/>
+          </a:effectRef>
+          <a:fontRef idx="minor">
+            <a:schemeClr val="lt1"/>
+          </a:fontRef>
+        </p:style>
+        <p:txBody>
+          <a:bodyPr rtlCol="0" anchor="ctr"/>
+          <a:lstStyle/>
+          <a:p>
+            <a:pPr algn="ctr"/>
+          </a:p>
+        </p:txBody>
+      </p:sp>
+      <p:sp>
+        <p:nvSpPr>
           <p:cNvPr id="2" name="Title 1"/>
           <p:cNvSpPr>
             <a:spLocks noGrp="1"/>
@@ -8269,6 +11937,12 @@
           <a:lstStyle/>
           <a:p>
             <a:r>
+              <a:rPr sz="3200" b="1">
+                <a:solidFill>
+                  <a:srgbClr val="152334"/>
+                </a:solidFill>
+                <a:latin typeface="Arial"/>
+              </a:rPr>
               <a:t>The Design Space</a:t>
             </a:r>
           </a:p>
@@ -8290,76 +11964,160 @@
           <a:lstStyle/>
           <a:p>
             <a:r>
+              <a:rPr sz="1400">
+                <a:solidFill>
+                  <a:srgbClr val="152334"/>
+                </a:solidFill>
+                <a:latin typeface="Arial"/>
+              </a:rPr>
               <a:t>Same RPi4 hardware — many possible systems:</a:t>
             </a:r>
           </a:p>
           <a:p/>
           <a:p>
             <a:r>
+              <a:rPr sz="1400">
+                <a:solidFill>
+                  <a:srgbClr val="152334"/>
+                </a:solidFill>
+                <a:latin typeface="Arial"/>
+              </a:rPr>
               <a:t>Minimal real-time controller</a:t>
             </a:r>
           </a:p>
           <a:p>
             <a:r>
+              <a:rPr sz="1400">
+                <a:solidFill>
+                  <a:srgbClr val="152334"/>
+                </a:solidFill>
+                <a:latin typeface="Arial"/>
+              </a:rPr>
               <a:t>  → Small rootfs, PREEMPT_RT kernel, bare application</a:t>
             </a:r>
           </a:p>
           <a:p/>
           <a:p>
             <a:r>
+              <a:rPr sz="1400">
+                <a:solidFill>
+                  <a:srgbClr val="152334"/>
+                </a:solidFill>
+                <a:latin typeface="Arial"/>
+              </a:rPr>
               <a:t>Network appliance / gateway</a:t>
             </a:r>
           </a:p>
           <a:p>
             <a:r>
+              <a:rPr sz="1400">
+                <a:solidFill>
+                  <a:srgbClr val="152334"/>
+                </a:solidFill>
+                <a:latin typeface="Arial"/>
+              </a:rPr>
               <a:t>  → Full networking stack, firewall, web interface</a:t>
             </a:r>
           </a:p>
           <a:p/>
           <a:p>
             <a:r>
+              <a:rPr sz="1400">
+                <a:solidFill>
+                  <a:srgbClr val="152334"/>
+                </a:solidFill>
+                <a:latin typeface="Arial"/>
+              </a:rPr>
               <a:t>AI edge inference device</a:t>
             </a:r>
           </a:p>
           <a:p>
             <a:r>
+              <a:rPr sz="1400">
+                <a:solidFill>
+                  <a:srgbClr val="152334"/>
+                </a:solidFill>
+                <a:latin typeface="Arial"/>
+              </a:rPr>
               <a:t>  → TensorFlow Lite, camera input, GPU acceleration</a:t>
             </a:r>
           </a:p>
           <a:p/>
           <a:p>
             <a:r>
+              <a:rPr sz="1400">
+                <a:solidFill>
+                  <a:srgbClr val="152334"/>
+                </a:solidFill>
+                <a:latin typeface="Arial"/>
+              </a:rPr>
               <a:t>Desktop replacement</a:t>
             </a:r>
           </a:p>
           <a:p>
             <a:r>
+              <a:rPr sz="1400">
+                <a:solidFill>
+                  <a:srgbClr val="152334"/>
+                </a:solidFill>
+                <a:latin typeface="Arial"/>
+              </a:rPr>
               <a:t>  → X11/Wayland, browser, full Debian userspace</a:t>
             </a:r>
           </a:p>
           <a:p/>
           <a:p>
             <a:r>
+              <a:rPr sz="1400">
+                <a:solidFill>
+                  <a:srgbClr val="152334"/>
+                </a:solidFill>
+                <a:latin typeface="Arial"/>
+              </a:rPr>
               <a:t>Your design choices determine:</a:t>
             </a:r>
           </a:p>
           <a:p>
             <a:r>
+              <a:rPr sz="1400">
+                <a:solidFill>
+                  <a:srgbClr val="152334"/>
+                </a:solidFill>
+                <a:latin typeface="Arial"/>
+              </a:rPr>
               <a:t>  • Kernel features enabled</a:t>
             </a:r>
           </a:p>
           <a:p>
             <a:r>
+              <a:rPr sz="1400">
+                <a:solidFill>
+                  <a:srgbClr val="152334"/>
+                </a:solidFill>
+                <a:latin typeface="Arial"/>
+              </a:rPr>
               <a:t>  • Rootfs size and contents</a:t>
             </a:r>
           </a:p>
           <a:p>
             <a:r>
+              <a:rPr sz="1400">
+                <a:solidFill>
+                  <a:srgbClr val="152334"/>
+                </a:solidFill>
+                <a:latin typeface="Arial"/>
+              </a:rPr>
               <a:t>  • Boot time requirements</a:t>
             </a:r>
           </a:p>
           <a:p>
             <a:r>
+              <a:rPr sz="1400">
+                <a:solidFill>
+                  <a:srgbClr val="152334"/>
+                </a:solidFill>
+                <a:latin typeface="Arial"/>
+              </a:rPr>
               <a:t>  • Real-time behavior</a:t>
             </a:r>
           </a:p>
